--- a/tri-peaks-camp-redesign/Tri_Peaks_Pitch_Test_CAMP_Design.pptx
+++ b/tri-peaks-camp-redesign/Tri_Peaks_Pitch_Test_CAMP_Design.pptx
@@ -7650,14 +7650,14 @@
       </p:grpSpPr>
       <p:sp>
         <p:nvSpPr>
-          <p:cNvPr id="75" name="Google Shape;75;p16"/>
+          <p:cNvPr id="81" name="Google Shape;81;p16"/>
           <p:cNvSpPr/>
           <p:nvPr/>
         </p:nvSpPr>
         <p:spPr>
           <a:xfrm>
-            <a:off x="496119" y="393576"/>
-            <a:ext cx="8151600" cy="228300"/>
+            <a:off x="429768" y="274320"/>
+            <a:ext cx="8284464" cy="402336"/>
           </a:xfrm>
           <a:prstGeom prst="rect">
             <a:avLst/>
@@ -7668,69 +7668,158 @@
           </a:ln>
         </p:spPr>
         <p:txBody>
-          <a:bodyPr anchorCtr="0" anchor="t" bIns="0" lIns="0" spcFirstLastPara="1" rIns="0" wrap="square" tIns="0">
+          <a:bodyPr anchorCtr="0" anchor="ctr" bIns="0" lIns="0" spcFirstLastPara="1" rIns="0" wrap="square" tIns="0">
             <a:noAutofit/>
           </a:bodyPr>
           <a:lstStyle/>
           <a:p>
             <a:pPr indent="0" lvl="0" marL="0" marR="0" rtl="0" algn="l">
-              <a:lnSpc>
-                <a:spcPct val="104000"/>
-              </a:lnSpc>
-              <a:spcBef>
-                <a:spcPts val="0"/>
-              </a:spcBef>
-              <a:spcAft>
-                <a:spcPts val="0"/>
-              </a:spcAft>
-              <a:buClr>
-                <a:srgbClr val="666666"/>
-              </a:buClr>
-              <a:buSzPts val="1400"/>
-              <a:buFont typeface="Inter"/>
-              <a:buNone/>
-            </a:pPr>
-            <a:r>
-              <a:rPr b="1" i="0" lang="en" sz="1400" u="none" cap="none" strike="noStrike">
+              <a:spcBef>
+                <a:spcPts val="0"/>
+              </a:spcBef>
+              <a:spcAft>
+                <a:spcPts val="0"/>
+              </a:spcAft>
+              <a:buNone/>
+            </a:pPr>
+            <a:r>
+              <a:rPr b="1" i="0" lang="en" sz="2000">
                 <a:solidFill>
                   <a:srgbClr val="666666"/>
                 </a:solidFill>
-                <a:latin typeface="Inter"/>
-                <a:ea typeface="Inter"/>
-                <a:cs typeface="Inter"/>
-                <a:sym typeface="Inter"/>
+                <a:latin typeface="Arial"/>
+                <a:ea typeface="Arial"/>
+                <a:cs typeface="Arial"/>
+                <a:sym typeface="Arial"/>
               </a:rPr>
               <a:t>Building Brand Demand to Lower Your PPC Cost-Per-Lead.</a:t>
             </a:r>
-            <a:endParaRPr b="0" i="0" sz="1400" u="none" cap="none" strike="noStrike">
-              <a:solidFill>
-                <a:schemeClr val="dk1"/>
-              </a:solidFill>
-              <a:latin typeface="Arial"/>
-              <a:ea typeface="Arial"/>
-              <a:cs typeface="Arial"/>
-              <a:sym typeface="Arial"/>
-            </a:endParaRPr>
-          </a:p>
-        </p:txBody>
-      </p:sp>
-      <p:pic>
-        <p:nvPicPr>
-          <p:cNvPr descr="preencoded.png" id="76" name="Google Shape;76;p16"/>
-          <p:cNvPicPr preferRelativeResize="0"/>
+            <a:endParaRPr sz="2000"/>
+          </a:p>
+        </p:txBody>
+      </p:sp>
+      <p:sp>
+        <p:nvSpPr>
+          <p:cNvPr id="82" name="Google Shape;82;p16"/>
+          <p:cNvSpPr/>
           <p:nvPr/>
-        </p:nvPicPr>
-        <p:blipFill rotWithShape="1">
-          <a:blip r:embed="rId3">
-            <a:alphaModFix/>
-          </a:blip>
-          <a:srcRect b="0" l="0" r="0" t="0"/>
-          <a:stretch/>
-        </p:blipFill>
-        <p:spPr>
-          <a:xfrm>
-            <a:off x="496119" y="720849"/>
-            <a:ext cx="3986634" cy="3986731"/>
+        </p:nvSpPr>
+        <p:spPr>
+          <a:xfrm>
+            <a:off x="429768" y="932688"/>
+            <a:ext cx="2578608" cy="1389888"/>
+          </a:xfrm>
+          <a:prstGeom prst="roundRect">
+            <a:avLst>
+              <a:gd fmla="val 2799" name="adj"/>
+            </a:avLst>
+          </a:prstGeom>
+          <a:solidFill>
+            <a:srgbClr val="FFFFFF"/>
+          </a:solidFill>
+          <a:ln cap="flat" cmpd="sng" w="9525">
+            <a:solidFill>
+              <a:srgbClr val="A7C142"/>
+            </a:solidFill>
+            <a:prstDash val="solid"/>
+            <a:round/>
+            <a:headEnd len="sm" w="sm" type="none"/>
+            <a:tailEnd len="sm" w="sm" type="none"/>
+          </a:ln>
+        </p:spPr>
+        <p:txBody>
+          <a:bodyPr anchorCtr="0" anchor="t" bIns="0" lIns="0" spcFirstLastPara="1" rIns="0" wrap="square" tIns="0">
+            <a:noAutofit/>
+          </a:bodyPr>
+          <a:lstStyle/>
+          <a:p>
+            <a:pPr indent="0" lvl="0" marL="0" marR="0" rtl="0" algn="l">
+              <a:spcBef>
+                <a:spcPts val="0"/>
+              </a:spcBef>
+              <a:spcAft>
+                <a:spcPts val="0"/>
+              </a:spcAft>
+              <a:buNone/>
+            </a:pPr>
+            <a:r>
+              <a:rPr b="0" i="0" lang="en" sz="900">
+                <a:solidFill>
+                  <a:srgbClr val="666666"/>
+                </a:solidFill>
+                <a:latin typeface="Arial"/>
+                <a:ea typeface="Arial"/>
+                <a:cs typeface="Arial"/>
+                <a:sym typeface="Arial"/>
+              </a:rPr>
+              <a:t/>
+            </a:r>
+            <a:endParaRPr sz="900"/>
+          </a:p>
+        </p:txBody>
+      </p:sp>
+      <p:sp>
+        <p:nvSpPr>
+          <p:cNvPr id="83" name="Google Shape;83;p16"/>
+          <p:cNvSpPr/>
+          <p:nvPr/>
+        </p:nvSpPr>
+        <p:spPr>
+          <a:xfrm>
+            <a:off x="1636776" y="1170432"/>
+            <a:ext cx="164592" cy="164592"/>
+          </a:xfrm>
+          <a:prstGeom prst="ellipse">
+            <a:avLst/>
+          </a:prstGeom>
+          <a:solidFill>
+            <a:srgbClr val="A7C142"/>
+          </a:solidFill>
+          <a:ln>
+            <a:noFill/>
+          </a:ln>
+        </p:spPr>
+        <p:txBody>
+          <a:bodyPr anchorCtr="0" anchor="t" bIns="0" lIns="0" spcFirstLastPara="1" rIns="0" wrap="square" tIns="0">
+            <a:noAutofit/>
+          </a:bodyPr>
+          <a:lstStyle/>
+          <a:p>
+            <a:pPr indent="0" lvl="0" marL="0" marR="0" rtl="0" algn="l">
+              <a:spcBef>
+                <a:spcPts val="0"/>
+              </a:spcBef>
+              <a:spcAft>
+                <a:spcPts val="0"/>
+              </a:spcAft>
+              <a:buNone/>
+            </a:pPr>
+            <a:r>
+              <a:rPr b="0" i="0" lang="en" sz="900">
+                <a:solidFill>
+                  <a:srgbClr val="666666"/>
+                </a:solidFill>
+                <a:latin typeface="Arial"/>
+                <a:ea typeface="Arial"/>
+                <a:cs typeface="Arial"/>
+                <a:sym typeface="Arial"/>
+              </a:rPr>
+              <a:t/>
+            </a:r>
+            <a:endParaRPr sz="900"/>
+          </a:p>
+        </p:txBody>
+      </p:sp>
+      <p:sp>
+        <p:nvSpPr>
+          <p:cNvPr id="84" name="Google Shape;84;p16"/>
+          <p:cNvSpPr/>
+          <p:nvPr/>
+        </p:nvSpPr>
+        <p:spPr>
+          <a:xfrm>
+            <a:off x="576072" y="1389888"/>
+            <a:ext cx="2286000" cy="402336"/>
           </a:xfrm>
           <a:prstGeom prst="rect">
             <a:avLst/>
@@ -7740,17 +7829,50 @@
             <a:noFill/>
           </a:ln>
         </p:spPr>
-      </p:pic>
-      <p:sp>
-        <p:nvSpPr>
-          <p:cNvPr id="77" name="Google Shape;77;p16"/>
+        <p:txBody>
+          <a:bodyPr anchorCtr="0" anchor="b" bIns="0" lIns="0" spcFirstLastPara="1" rIns="0" wrap="square" tIns="0">
+            <a:noAutofit/>
+          </a:bodyPr>
+          <a:lstStyle/>
+          <a:p>
+            <a:pPr indent="0" lvl="0" marL="0" marR="0" rtl="0" algn="ctr">
+              <a:lnSpc>
+                <a:spcPct val="100000"/>
+              </a:lnSpc>
+              <a:spcBef>
+                <a:spcPts val="0"/>
+              </a:spcBef>
+              <a:spcAft>
+                <a:spcPts val="0"/>
+              </a:spcAft>
+              <a:buNone/>
+            </a:pPr>
+            <a:r>
+              <a:rPr b="1" i="0" lang="en" sz="1100">
+                <a:solidFill>
+                  <a:srgbClr val="003726"/>
+                </a:solidFill>
+                <a:latin typeface="Arial"/>
+                <a:ea typeface="Arial"/>
+                <a:cs typeface="Arial"/>
+                <a:sym typeface="Arial"/>
+              </a:rPr>
+              <a:t>CTV Awareness</a:t>
+            </a:r>
+            <a:endParaRPr sz="1100"/>
+          </a:p>
+        </p:txBody>
+      </p:sp>
+      <p:sp>
+        <p:nvSpPr>
+          <p:cNvPr id="85" name="Google Shape;85;p16"/>
           <p:cNvSpPr/>
           <p:nvPr/>
         </p:nvSpPr>
         <p:spPr>
           <a:xfrm>
-            <a:off x="4665918" y="2372023"/>
-            <a:ext cx="3986700" cy="114300"/>
+            <a:off x="576072" y="1819656"/>
+            <a:ext cx="2286000" cy="420624"/>
           </a:xfrm>
           <a:prstGeom prst="rect">
             <a:avLst/>
@@ -7766,9 +7888,9 @@
           </a:bodyPr>
           <a:lstStyle/>
           <a:p>
-            <a:pPr indent="0" lvl="0" marL="0" marR="0" rtl="0" algn="l">
+            <a:pPr indent="0" lvl="0" marL="0" marR="0" rtl="0" algn="ctr">
               <a:lnSpc>
-                <a:spcPct val="104000"/>
+                <a:spcPct val="100000"/>
               </a:lnSpc>
               <a:spcBef>
                 <a:spcPts val="0"/>
@@ -7776,47 +7898,198 @@
               <a:spcAft>
                 <a:spcPts val="0"/>
               </a:spcAft>
-              <a:buClr>
-                <a:srgbClr val="666666"/>
-              </a:buClr>
-              <a:buSzPts val="700"/>
-              <a:buFont typeface="Inter"/>
-              <a:buNone/>
-            </a:pPr>
-            <a:r>
-              <a:rPr b="1" i="0" lang="en" sz="700" u="none" cap="none" strike="noStrike">
+              <a:buNone/>
+            </a:pPr>
+            <a:r>
+              <a:rPr b="0" i="0" lang="en" sz="800">
                 <a:solidFill>
                   <a:srgbClr val="666666"/>
                 </a:solidFill>
-                <a:latin typeface="Inter"/>
-                <a:ea typeface="Inter"/>
-                <a:cs typeface="Inter"/>
-                <a:sym typeface="Inter"/>
+                <a:latin typeface="Arial"/>
+                <a:ea typeface="Arial"/>
+                <a:cs typeface="Arial"/>
+                <a:sym typeface="Arial"/>
               </a:rPr>
-              <a:t>Search &amp; TV Working Together</a:t>
-            </a:r>
-            <a:endParaRPr b="0" i="0" sz="700" u="none" cap="none" strike="noStrike">
-              <a:solidFill>
-                <a:schemeClr val="dk1"/>
-              </a:solidFill>
-              <a:latin typeface="Arial"/>
-              <a:ea typeface="Arial"/>
-              <a:cs typeface="Arial"/>
-              <a:sym typeface="Arial"/>
-            </a:endParaRPr>
-          </a:p>
-        </p:txBody>
-      </p:sp>
-      <p:sp>
-        <p:nvSpPr>
-          <p:cNvPr id="78" name="Google Shape;78;p16"/>
+              <a:t>(top-of-mind brand trust on living room screens)</a:t>
+            </a:r>
+            <a:endParaRPr sz="800"/>
+          </a:p>
+        </p:txBody>
+      </p:sp>
+      <p:sp>
+        <p:nvSpPr>
+          <p:cNvPr id="86" name="Google Shape;86;p16"/>
           <p:cNvSpPr/>
           <p:nvPr/>
         </p:nvSpPr>
         <p:spPr>
-          <a:xfrm>
-            <a:off x="4665918" y="2523902"/>
-            <a:ext cx="3986700" cy="177000"/>
+          <a:xfrm rot="5400000">
+            <a:off x="3063240" y="1536192"/>
+            <a:ext cx="164592" cy="182880"/>
+          </a:xfrm>
+          <a:prstGeom prst="triangle">
+            <a:avLst/>
+          </a:prstGeom>
+          <a:solidFill>
+            <a:srgbClr val="A7C142"/>
+          </a:solidFill>
+          <a:ln>
+            <a:noFill/>
+          </a:ln>
+        </p:spPr>
+        <p:txBody>
+          <a:bodyPr anchorCtr="0" anchor="t" bIns="0" lIns="0" spcFirstLastPara="1" rIns="0" wrap="square" tIns="0">
+            <a:noAutofit/>
+          </a:bodyPr>
+          <a:lstStyle/>
+          <a:p>
+            <a:pPr indent="0" lvl="0" marL="0" marR="0" rtl="0" algn="l">
+              <a:spcBef>
+                <a:spcPts val="0"/>
+              </a:spcBef>
+              <a:spcAft>
+                <a:spcPts val="0"/>
+              </a:spcAft>
+              <a:buNone/>
+            </a:pPr>
+            <a:r>
+              <a:rPr b="0" i="0" lang="en" sz="900">
+                <a:solidFill>
+                  <a:srgbClr val="666666"/>
+                </a:solidFill>
+                <a:latin typeface="Arial"/>
+                <a:ea typeface="Arial"/>
+                <a:cs typeface="Arial"/>
+                <a:sym typeface="Arial"/>
+              </a:rPr>
+              <a:t/>
+            </a:r>
+            <a:endParaRPr sz="900"/>
+          </a:p>
+        </p:txBody>
+      </p:sp>
+      <p:sp>
+        <p:nvSpPr>
+          <p:cNvPr id="87" name="Google Shape;87;p16"/>
+          <p:cNvSpPr/>
+          <p:nvPr/>
+        </p:nvSpPr>
+        <p:spPr>
+          <a:xfrm>
+            <a:off x="3282696" y="932688"/>
+            <a:ext cx="2578608" cy="1389888"/>
+          </a:xfrm>
+          <a:prstGeom prst="roundRect">
+            <a:avLst>
+              <a:gd fmla="val 2799" name="adj"/>
+            </a:avLst>
+          </a:prstGeom>
+          <a:solidFill>
+            <a:srgbClr val="FFFFFF"/>
+          </a:solidFill>
+          <a:ln cap="flat" cmpd="sng" w="9525">
+            <a:solidFill>
+              <a:srgbClr val="A7C142"/>
+            </a:solidFill>
+            <a:prstDash val="solid"/>
+            <a:round/>
+            <a:headEnd len="sm" w="sm" type="none"/>
+            <a:tailEnd len="sm" w="sm" type="none"/>
+          </a:ln>
+        </p:spPr>
+        <p:txBody>
+          <a:bodyPr anchorCtr="0" anchor="t" bIns="0" lIns="0" spcFirstLastPara="1" rIns="0" wrap="square" tIns="0">
+            <a:noAutofit/>
+          </a:bodyPr>
+          <a:lstStyle/>
+          <a:p>
+            <a:pPr indent="0" lvl="0" marL="0" marR="0" rtl="0" algn="l">
+              <a:spcBef>
+                <a:spcPts val="0"/>
+              </a:spcBef>
+              <a:spcAft>
+                <a:spcPts val="0"/>
+              </a:spcAft>
+              <a:buNone/>
+            </a:pPr>
+            <a:r>
+              <a:rPr b="0" i="0" lang="en" sz="900">
+                <a:solidFill>
+                  <a:srgbClr val="666666"/>
+                </a:solidFill>
+                <a:latin typeface="Arial"/>
+                <a:ea typeface="Arial"/>
+                <a:cs typeface="Arial"/>
+                <a:sym typeface="Arial"/>
+              </a:rPr>
+              <a:t/>
+            </a:r>
+            <a:endParaRPr sz="900"/>
+          </a:p>
+        </p:txBody>
+      </p:sp>
+      <p:sp>
+        <p:nvSpPr>
+          <p:cNvPr id="88" name="Google Shape;88;p16"/>
+          <p:cNvSpPr/>
+          <p:nvPr/>
+        </p:nvSpPr>
+        <p:spPr>
+          <a:xfrm>
+            <a:off x="4489704" y="1170432"/>
+            <a:ext cx="164592" cy="164592"/>
+          </a:xfrm>
+          <a:prstGeom prst="ellipse">
+            <a:avLst/>
+          </a:prstGeom>
+          <a:solidFill>
+            <a:srgbClr val="A7C142"/>
+          </a:solidFill>
+          <a:ln>
+            <a:noFill/>
+          </a:ln>
+        </p:spPr>
+        <p:txBody>
+          <a:bodyPr anchorCtr="0" anchor="t" bIns="0" lIns="0" spcFirstLastPara="1" rIns="0" wrap="square" tIns="0">
+            <a:noAutofit/>
+          </a:bodyPr>
+          <a:lstStyle/>
+          <a:p>
+            <a:pPr indent="0" lvl="0" marL="0" marR="0" rtl="0" algn="l">
+              <a:spcBef>
+                <a:spcPts val="0"/>
+              </a:spcBef>
+              <a:spcAft>
+                <a:spcPts val="0"/>
+              </a:spcAft>
+              <a:buNone/>
+            </a:pPr>
+            <a:r>
+              <a:rPr b="0" i="0" lang="en" sz="900">
+                <a:solidFill>
+                  <a:srgbClr val="666666"/>
+                </a:solidFill>
+                <a:latin typeface="Arial"/>
+                <a:ea typeface="Arial"/>
+                <a:cs typeface="Arial"/>
+                <a:sym typeface="Arial"/>
+              </a:rPr>
+              <a:t/>
+            </a:r>
+            <a:endParaRPr sz="900"/>
+          </a:p>
+        </p:txBody>
+      </p:sp>
+      <p:sp>
+        <p:nvSpPr>
+          <p:cNvPr id="89" name="Google Shape;89;p16"/>
+          <p:cNvSpPr/>
+          <p:nvPr/>
+        </p:nvSpPr>
+        <p:spPr>
+          <a:xfrm>
+            <a:off x="3429000" y="1389888"/>
+            <a:ext cx="2286000" cy="402336"/>
           </a:xfrm>
           <a:prstGeom prst="rect">
             <a:avLst/>
@@ -7827,14 +8100,67 @@
           </a:ln>
         </p:spPr>
         <p:txBody>
+          <a:bodyPr anchorCtr="0" anchor="b" bIns="0" lIns="0" spcFirstLastPara="1" rIns="0" wrap="square" tIns="0">
+            <a:noAutofit/>
+          </a:bodyPr>
+          <a:lstStyle/>
+          <a:p>
+            <a:pPr indent="0" lvl="0" marL="0" marR="0" rtl="0" algn="ctr">
+              <a:lnSpc>
+                <a:spcPct val="100000"/>
+              </a:lnSpc>
+              <a:spcBef>
+                <a:spcPts val="0"/>
+              </a:spcBef>
+              <a:spcAft>
+                <a:spcPts val="0"/>
+              </a:spcAft>
+              <a:buNone/>
+            </a:pPr>
+            <a:r>
+              <a:rPr b="1" i="0" lang="en" sz="1100">
+                <a:solidFill>
+                  <a:srgbClr val="003726"/>
+                </a:solidFill>
+                <a:latin typeface="Arial"/>
+                <a:ea typeface="Arial"/>
+                <a:cs typeface="Arial"/>
+                <a:sym typeface="Arial"/>
+              </a:rPr>
+              <a:t>Branded Searches</a:t>
+            </a:r>
+            <a:endParaRPr sz="1100"/>
+          </a:p>
+        </p:txBody>
+      </p:sp>
+      <p:sp>
+        <p:nvSpPr>
+          <p:cNvPr id="90" name="Google Shape;90;p16"/>
+          <p:cNvSpPr/>
+          <p:nvPr/>
+        </p:nvSpPr>
+        <p:spPr>
+          <a:xfrm>
+            <a:off x="3429000" y="1819656"/>
+            <a:ext cx="2286000" cy="420624"/>
+          </a:xfrm>
+          <a:prstGeom prst="rect">
+            <a:avLst/>
+          </a:prstGeom>
+          <a:noFill/>
+          <a:ln>
+            <a:noFill/>
+          </a:ln>
+        </p:spPr>
+        <p:txBody>
           <a:bodyPr anchorCtr="0" anchor="t" bIns="0" lIns="0" spcFirstLastPara="1" rIns="0" wrap="square" tIns="0">
             <a:noAutofit/>
           </a:bodyPr>
           <a:lstStyle/>
           <a:p>
-            <a:pPr indent="0" lvl="0" marL="0" marR="0" rtl="0" algn="l">
+            <a:pPr indent="0" lvl="0" marL="0" marR="0" rtl="0" algn="ctr">
               <a:lnSpc>
-                <a:spcPct val="101000"/>
+                <a:spcPct val="100000"/>
               </a:lnSpc>
               <a:spcBef>
                 <a:spcPts val="0"/>
@@ -7842,47 +8168,198 @@
               <a:spcAft>
                 <a:spcPts val="0"/>
               </a:spcAft>
-              <a:buClr>
-                <a:srgbClr val="666666"/>
-              </a:buClr>
-              <a:buSzPts val="600"/>
-              <a:buFont typeface="Inter"/>
-              <a:buNone/>
-            </a:pPr>
-            <a:r>
-              <a:rPr b="0" i="0" lang="en" sz="600" u="none" cap="none" strike="noStrike">
+              <a:buNone/>
+            </a:pPr>
+            <a:r>
+              <a:rPr b="0" i="0" lang="en" sz="800">
                 <a:solidFill>
                   <a:srgbClr val="666666"/>
                 </a:solidFill>
-                <a:latin typeface="Inter"/>
-                <a:ea typeface="Inter"/>
-                <a:cs typeface="Inter"/>
-                <a:sym typeface="Inter"/>
+                <a:latin typeface="Arial"/>
+                <a:ea typeface="Arial"/>
+                <a:cs typeface="Arial"/>
+                <a:sym typeface="Arial"/>
               </a:rPr>
-              <a:t>CTV creates top-of-mind trust. Search PPC captures the appointment when the repair is needed. Together, they compound your results.</a:t>
-            </a:r>
-            <a:endParaRPr b="0" i="0" sz="600" u="none" cap="none" strike="noStrike">
-              <a:solidFill>
-                <a:schemeClr val="dk1"/>
-              </a:solidFill>
-              <a:latin typeface="Arial"/>
-              <a:ea typeface="Arial"/>
-              <a:cs typeface="Arial"/>
-              <a:sym typeface="Arial"/>
-            </a:endParaRPr>
-          </a:p>
-        </p:txBody>
-      </p:sp>
-      <p:sp>
-        <p:nvSpPr>
-          <p:cNvPr id="79" name="Google Shape;79;p16"/>
+              <a:t>(homeowners search your name directly)</a:t>
+            </a:r>
+            <a:endParaRPr sz="800"/>
+          </a:p>
+        </p:txBody>
+      </p:sp>
+      <p:sp>
+        <p:nvSpPr>
+          <p:cNvPr id="91" name="Google Shape;91;p16"/>
           <p:cNvSpPr/>
           <p:nvPr/>
         </p:nvSpPr>
         <p:spPr>
-          <a:xfrm>
-            <a:off x="4665918" y="2738661"/>
-            <a:ext cx="3986700" cy="114300"/>
+          <a:xfrm rot="5400000">
+            <a:off x="5916168" y="1536192"/>
+            <a:ext cx="164592" cy="182880"/>
+          </a:xfrm>
+          <a:prstGeom prst="triangle">
+            <a:avLst/>
+          </a:prstGeom>
+          <a:solidFill>
+            <a:srgbClr val="A7C142"/>
+          </a:solidFill>
+          <a:ln>
+            <a:noFill/>
+          </a:ln>
+        </p:spPr>
+        <p:txBody>
+          <a:bodyPr anchorCtr="0" anchor="t" bIns="0" lIns="0" spcFirstLastPara="1" rIns="0" wrap="square" tIns="0">
+            <a:noAutofit/>
+          </a:bodyPr>
+          <a:lstStyle/>
+          <a:p>
+            <a:pPr indent="0" lvl="0" marL="0" marR="0" rtl="0" algn="l">
+              <a:spcBef>
+                <a:spcPts val="0"/>
+              </a:spcBef>
+              <a:spcAft>
+                <a:spcPts val="0"/>
+              </a:spcAft>
+              <a:buNone/>
+            </a:pPr>
+            <a:r>
+              <a:rPr b="0" i="0" lang="en" sz="900">
+                <a:solidFill>
+                  <a:srgbClr val="666666"/>
+                </a:solidFill>
+                <a:latin typeface="Arial"/>
+                <a:ea typeface="Arial"/>
+                <a:cs typeface="Arial"/>
+                <a:sym typeface="Arial"/>
+              </a:rPr>
+              <a:t/>
+            </a:r>
+            <a:endParaRPr sz="900"/>
+          </a:p>
+        </p:txBody>
+      </p:sp>
+      <p:sp>
+        <p:nvSpPr>
+          <p:cNvPr id="92" name="Google Shape;92;p16"/>
+          <p:cNvSpPr/>
+          <p:nvPr/>
+        </p:nvSpPr>
+        <p:spPr>
+          <a:xfrm>
+            <a:off x="6135624" y="932688"/>
+            <a:ext cx="2578608" cy="1389888"/>
+          </a:xfrm>
+          <a:prstGeom prst="roundRect">
+            <a:avLst>
+              <a:gd fmla="val 2799" name="adj"/>
+            </a:avLst>
+          </a:prstGeom>
+          <a:solidFill>
+            <a:srgbClr val="FFFFFF"/>
+          </a:solidFill>
+          <a:ln cap="flat" cmpd="sng" w="9525">
+            <a:solidFill>
+              <a:srgbClr val="A7C142"/>
+            </a:solidFill>
+            <a:prstDash val="solid"/>
+            <a:round/>
+            <a:headEnd len="sm" w="sm" type="none"/>
+            <a:tailEnd len="sm" w="sm" type="none"/>
+          </a:ln>
+        </p:spPr>
+        <p:txBody>
+          <a:bodyPr anchorCtr="0" anchor="t" bIns="0" lIns="0" spcFirstLastPara="1" rIns="0" wrap="square" tIns="0">
+            <a:noAutofit/>
+          </a:bodyPr>
+          <a:lstStyle/>
+          <a:p>
+            <a:pPr indent="0" lvl="0" marL="0" marR="0" rtl="0" algn="l">
+              <a:spcBef>
+                <a:spcPts val="0"/>
+              </a:spcBef>
+              <a:spcAft>
+                <a:spcPts val="0"/>
+              </a:spcAft>
+              <a:buNone/>
+            </a:pPr>
+            <a:r>
+              <a:rPr b="0" i="0" lang="en" sz="900">
+                <a:solidFill>
+                  <a:srgbClr val="666666"/>
+                </a:solidFill>
+                <a:latin typeface="Arial"/>
+                <a:ea typeface="Arial"/>
+                <a:cs typeface="Arial"/>
+                <a:sym typeface="Arial"/>
+              </a:rPr>
+              <a:t/>
+            </a:r>
+            <a:endParaRPr sz="900"/>
+          </a:p>
+        </p:txBody>
+      </p:sp>
+      <p:sp>
+        <p:nvSpPr>
+          <p:cNvPr id="93" name="Google Shape;93;p16"/>
+          <p:cNvSpPr/>
+          <p:nvPr/>
+        </p:nvSpPr>
+        <p:spPr>
+          <a:xfrm>
+            <a:off x="7342632" y="1170432"/>
+            <a:ext cx="164592" cy="164592"/>
+          </a:xfrm>
+          <a:prstGeom prst="ellipse">
+            <a:avLst/>
+          </a:prstGeom>
+          <a:solidFill>
+            <a:srgbClr val="A7C142"/>
+          </a:solidFill>
+          <a:ln>
+            <a:noFill/>
+          </a:ln>
+        </p:spPr>
+        <p:txBody>
+          <a:bodyPr anchorCtr="0" anchor="t" bIns="0" lIns="0" spcFirstLastPara="1" rIns="0" wrap="square" tIns="0">
+            <a:noAutofit/>
+          </a:bodyPr>
+          <a:lstStyle/>
+          <a:p>
+            <a:pPr indent="0" lvl="0" marL="0" marR="0" rtl="0" algn="l">
+              <a:spcBef>
+                <a:spcPts val="0"/>
+              </a:spcBef>
+              <a:spcAft>
+                <a:spcPts val="0"/>
+              </a:spcAft>
+              <a:buNone/>
+            </a:pPr>
+            <a:r>
+              <a:rPr b="0" i="0" lang="en" sz="900">
+                <a:solidFill>
+                  <a:srgbClr val="666666"/>
+                </a:solidFill>
+                <a:latin typeface="Arial"/>
+                <a:ea typeface="Arial"/>
+                <a:cs typeface="Arial"/>
+                <a:sym typeface="Arial"/>
+              </a:rPr>
+              <a:t/>
+            </a:r>
+            <a:endParaRPr sz="900"/>
+          </a:p>
+        </p:txBody>
+      </p:sp>
+      <p:sp>
+        <p:nvSpPr>
+          <p:cNvPr id="94" name="Google Shape;94;p16"/>
+          <p:cNvSpPr/>
+          <p:nvPr/>
+        </p:nvSpPr>
+        <p:spPr>
+          <a:xfrm>
+            <a:off x="6281928" y="1389888"/>
+            <a:ext cx="2286000" cy="402336"/>
           </a:xfrm>
           <a:prstGeom prst="rect">
             <a:avLst/>
@@ -7893,14 +8370,67 @@
           </a:ln>
         </p:spPr>
         <p:txBody>
+          <a:bodyPr anchorCtr="0" anchor="b" bIns="0" lIns="0" spcFirstLastPara="1" rIns="0" wrap="square" tIns="0">
+            <a:noAutofit/>
+          </a:bodyPr>
+          <a:lstStyle/>
+          <a:p>
+            <a:pPr indent="0" lvl="0" marL="0" marR="0" rtl="0" algn="ctr">
+              <a:lnSpc>
+                <a:spcPct val="100000"/>
+              </a:lnSpc>
+              <a:spcBef>
+                <a:spcPts val="0"/>
+              </a:spcBef>
+              <a:spcAft>
+                <a:spcPts val="0"/>
+              </a:spcAft>
+              <a:buNone/>
+            </a:pPr>
+            <a:r>
+              <a:rPr b="1" i="0" lang="en" sz="1100">
+                <a:solidFill>
+                  <a:srgbClr val="003726"/>
+                </a:solidFill>
+                <a:latin typeface="Arial"/>
+                <a:ea typeface="Arial"/>
+                <a:cs typeface="Arial"/>
+                <a:sym typeface="Arial"/>
+              </a:rPr>
+              <a:t>Lower CPL and Higher PPC Conversion Rates</a:t>
+            </a:r>
+            <a:endParaRPr sz="1100"/>
+          </a:p>
+        </p:txBody>
+      </p:sp>
+      <p:sp>
+        <p:nvSpPr>
+          <p:cNvPr id="95" name="Google Shape;95;p16"/>
+          <p:cNvSpPr/>
+          <p:nvPr/>
+        </p:nvSpPr>
+        <p:spPr>
+          <a:xfrm>
+            <a:off x="6281928" y="1819656"/>
+            <a:ext cx="2286000" cy="420624"/>
+          </a:xfrm>
+          <a:prstGeom prst="rect">
+            <a:avLst/>
+          </a:prstGeom>
+          <a:noFill/>
+          <a:ln>
+            <a:noFill/>
+          </a:ln>
+        </p:spPr>
+        <p:txBody>
           <a:bodyPr anchorCtr="0" anchor="t" bIns="0" lIns="0" spcFirstLastPara="1" rIns="0" wrap="square" tIns="0">
             <a:noAutofit/>
           </a:bodyPr>
           <a:lstStyle/>
           <a:p>
-            <a:pPr indent="0" lvl="0" marL="0" marR="0" rtl="0" algn="l">
+            <a:pPr indent="0" lvl="0" marL="0" marR="0" rtl="0" algn="ctr">
               <a:lnSpc>
-                <a:spcPct val="104000"/>
+                <a:spcPct val="100000"/>
               </a:lnSpc>
               <a:spcBef>
                 <a:spcPts val="0"/>
@@ -7908,47 +8438,140 @@
               <a:spcAft>
                 <a:spcPts val="0"/>
               </a:spcAft>
-              <a:buClr>
-                <a:srgbClr val="666666"/>
-              </a:buClr>
-              <a:buSzPts val="700"/>
-              <a:buFont typeface="Inter"/>
-              <a:buNone/>
-            </a:pPr>
-            <a:r>
-              <a:rPr b="1" i="0" lang="en" sz="700" u="none" cap="none" strike="noStrike">
+              <a:buNone/>
+            </a:pPr>
+            <a:r>
+              <a:rPr b="0" i="0" lang="en" sz="800">
                 <a:solidFill>
                   <a:srgbClr val="666666"/>
                 </a:solidFill>
-                <a:latin typeface="Inter"/>
-                <a:ea typeface="Inter"/>
-                <a:cs typeface="Inter"/>
-                <a:sym typeface="Inter"/>
+                <a:latin typeface="Arial"/>
+                <a:ea typeface="Arial"/>
+                <a:cs typeface="Arial"/>
+                <a:sym typeface="Arial"/>
               </a:rPr>
-              <a:t>Cross-Channel Retargeting</a:t>
-            </a:r>
-            <a:endParaRPr b="0" i="0" sz="700" u="none" cap="none" strike="noStrike">
-              <a:solidFill>
-                <a:schemeClr val="dk1"/>
-              </a:solidFill>
-              <a:latin typeface="Arial"/>
-              <a:ea typeface="Arial"/>
-              <a:cs typeface="Arial"/>
-              <a:sym typeface="Arial"/>
-            </a:endParaRPr>
-          </a:p>
-        </p:txBody>
-      </p:sp>
-      <p:sp>
-        <p:nvSpPr>
-          <p:cNvPr id="80" name="Google Shape;80;p16"/>
+              <a:t>(higher CTR, lower acquisition cost)</a:t>
+            </a:r>
+            <a:endParaRPr sz="800"/>
+          </a:p>
+        </p:txBody>
+      </p:sp>
+      <p:sp>
+        <p:nvSpPr>
+          <p:cNvPr id="96" name="Google Shape;96;p16"/>
           <p:cNvSpPr/>
           <p:nvPr/>
         </p:nvSpPr>
         <p:spPr>
           <a:xfrm>
-            <a:off x="4665918" y="2890540"/>
-            <a:ext cx="3986700" cy="190200"/>
+            <a:off x="1719072" y="2487168"/>
+            <a:ext cx="5705856" cy="118872"/>
+          </a:xfrm>
+          <a:prstGeom prst="leftArrow">
+            <a:avLst/>
+          </a:prstGeom>
+          <a:solidFill>
+            <a:srgbClr val="A7C142"/>
+          </a:solidFill>
+          <a:ln>
+            <a:noFill/>
+          </a:ln>
+        </p:spPr>
+        <p:txBody>
+          <a:bodyPr anchorCtr="0" anchor="t" bIns="0" lIns="0" spcFirstLastPara="1" rIns="0" wrap="square" tIns="0">
+            <a:noAutofit/>
+          </a:bodyPr>
+          <a:lstStyle/>
+          <a:p>
+            <a:pPr indent="0" lvl="0" marL="0" marR="0" rtl="0" algn="l">
+              <a:spcBef>
+                <a:spcPts val="0"/>
+              </a:spcBef>
+              <a:spcAft>
+                <a:spcPts val="0"/>
+              </a:spcAft>
+              <a:buNone/>
+            </a:pPr>
+            <a:r>
+              <a:rPr b="0" i="0" lang="en" sz="900">
+                <a:solidFill>
+                  <a:srgbClr val="666666"/>
+                </a:solidFill>
+                <a:latin typeface="Arial"/>
+                <a:ea typeface="Arial"/>
+                <a:cs typeface="Arial"/>
+                <a:sym typeface="Arial"/>
+              </a:rPr>
+              <a:t/>
+            </a:r>
+            <a:endParaRPr sz="900"/>
+          </a:p>
+        </p:txBody>
+      </p:sp>
+      <p:sp>
+        <p:nvSpPr>
+          <p:cNvPr id="97" name="Google Shape;97;p16"/>
+          <p:cNvSpPr/>
+          <p:nvPr/>
+        </p:nvSpPr>
+        <p:spPr>
+          <a:xfrm>
+            <a:off x="429768" y="2816352"/>
+            <a:ext cx="8284464" cy="640080"/>
+          </a:xfrm>
+          <a:prstGeom prst="roundRect">
+            <a:avLst>
+              <a:gd fmla="val 2799" name="adj"/>
+            </a:avLst>
+          </a:prstGeom>
+          <a:solidFill>
+            <a:srgbClr val="A7C142"/>
+          </a:solidFill>
+          <a:ln>
+            <a:noFill/>
+          </a:ln>
+        </p:spPr>
+        <p:txBody>
+          <a:bodyPr anchorCtr="0" anchor="t" bIns="0" lIns="0" spcFirstLastPara="1" rIns="0" wrap="square" tIns="0">
+            <a:noAutofit/>
+          </a:bodyPr>
+          <a:lstStyle/>
+          <a:p>
+            <a:pPr indent="0" lvl="0" marL="0" marR="0" rtl="0" algn="l">
+              <a:spcBef>
+                <a:spcPts val="0"/>
+              </a:spcBef>
+              <a:spcAft>
+                <a:spcPts val="0"/>
+              </a:spcAft>
+              <a:buNone/>
+            </a:pPr>
+            <a:r>
+              <a:rPr b="0" i="0" lang="en" sz="900">
+                <a:solidFill>
+                  <a:srgbClr val="666666"/>
+                </a:solidFill>
+                <a:latin typeface="Arial"/>
+                <a:ea typeface="Arial"/>
+                <a:cs typeface="Arial"/>
+                <a:sym typeface="Arial"/>
+              </a:rPr>
+              <a:t/>
+            </a:r>
+            <a:endParaRPr sz="900"/>
+          </a:p>
+        </p:txBody>
+      </p:sp>
+      <p:sp>
+        <p:nvSpPr>
+          <p:cNvPr id="98" name="Google Shape;98;p16"/>
+          <p:cNvSpPr/>
+          <p:nvPr/>
+        </p:nvSpPr>
+        <p:spPr>
+          <a:xfrm>
+            <a:off x="658368" y="2926080"/>
+            <a:ext cx="7827264" cy="164592"/>
           </a:xfrm>
           <a:prstGeom prst="rect">
             <a:avLst/>
@@ -7959,67 +8582,263 @@
           </a:ln>
         </p:spPr>
         <p:txBody>
-          <a:bodyPr anchorCtr="0" anchor="t" bIns="0" lIns="0" spcFirstLastPara="1" rIns="0" wrap="square" tIns="29225">
-            <a:noAutofit/>
-          </a:bodyPr>
-          <a:lstStyle/>
-          <a:p>
-            <a:pPr indent="-114300" lvl="0" marL="114300" marR="0" rtl="0" algn="l">
-              <a:lnSpc>
-                <a:spcPct val="101000"/>
-              </a:lnSpc>
-              <a:spcBef>
-                <a:spcPts val="0"/>
-              </a:spcBef>
-              <a:spcAft>
-                <a:spcPts val="0"/>
-              </a:spcAft>
-              <a:buClr>
-                <a:srgbClr val="666666"/>
-              </a:buClr>
-              <a:buSzPts val="600"/>
-              <a:buFont typeface="Inter"/>
-              <a:buChar char="•"/>
-            </a:pPr>
-            <a:r>
-              <a:rPr b="1" i="0" lang="en" sz="600" u="none" cap="none" strike="noStrike">
+          <a:bodyPr anchorCtr="0" anchor="ctr" bIns="0" lIns="0" spcFirstLastPara="1" rIns="0" wrap="square" tIns="0">
+            <a:noAutofit/>
+          </a:bodyPr>
+          <a:lstStyle/>
+          <a:p>
+            <a:pPr indent="0" lvl="0" marL="0" marR="0" rtl="0" algn="l">
+              <a:spcBef>
+                <a:spcPts val="0"/>
+              </a:spcBef>
+              <a:spcAft>
+                <a:spcPts val="0"/>
+              </a:spcAft>
+              <a:buNone/>
+            </a:pPr>
+            <a:r>
+              <a:rPr b="1" i="0" lang="en" sz="900">
+                <a:solidFill>
+                  <a:srgbClr val="003726"/>
+                </a:solidFill>
+                <a:latin typeface="Arial"/>
+                <a:ea typeface="Arial"/>
+                <a:cs typeface="Arial"/>
+                <a:sym typeface="Arial"/>
+              </a:rPr>
+              <a:t>Search &amp; TV Working Together</a:t>
+            </a:r>
+            <a:endParaRPr sz="900"/>
+          </a:p>
+        </p:txBody>
+      </p:sp>
+      <p:sp>
+        <p:nvSpPr>
+          <p:cNvPr id="99" name="Google Shape;99;p16"/>
+          <p:cNvSpPr/>
+          <p:nvPr/>
+        </p:nvSpPr>
+        <p:spPr>
+          <a:xfrm>
+            <a:off x="658368" y="3118104"/>
+            <a:ext cx="7827264" cy="201168"/>
+          </a:xfrm>
+          <a:prstGeom prst="rect">
+            <a:avLst/>
+          </a:prstGeom>
+          <a:noFill/>
+          <a:ln>
+            <a:noFill/>
+          </a:ln>
+        </p:spPr>
+        <p:txBody>
+          <a:bodyPr anchorCtr="0" anchor="ctr" bIns="0" lIns="0" spcFirstLastPara="1" rIns="0" wrap="square" tIns="0">
+            <a:noAutofit/>
+          </a:bodyPr>
+          <a:lstStyle/>
+          <a:p>
+            <a:pPr indent="0" lvl="0" marL="0" marR="0" rtl="0" algn="l">
+              <a:spcBef>
+                <a:spcPts val="0"/>
+              </a:spcBef>
+              <a:spcAft>
+                <a:spcPts val="0"/>
+              </a:spcAft>
+              <a:buNone/>
+            </a:pPr>
+            <a:r>
+              <a:rPr b="0" i="0" lang="en" sz="800">
+                <a:solidFill>
+                  <a:srgbClr val="003726"/>
+                </a:solidFill>
+                <a:latin typeface="Arial"/>
+                <a:ea typeface="Arial"/>
+                <a:cs typeface="Arial"/>
+                <a:sym typeface="Arial"/>
+              </a:rPr>
+              <a:t>CTV creates top-of-mind trust. Search PPC captures the appointment when the repair is needed. Together, they compound your results.</a:t>
+            </a:r>
+            <a:endParaRPr sz="800"/>
+          </a:p>
+        </p:txBody>
+      </p:sp>
+      <p:sp>
+        <p:nvSpPr>
+          <p:cNvPr id="100" name="Google Shape;100;p16"/>
+          <p:cNvSpPr/>
+          <p:nvPr/>
+        </p:nvSpPr>
+        <p:spPr>
+          <a:xfrm>
+            <a:off x="429768" y="3621024"/>
+            <a:ext cx="8284464" cy="914400"/>
+          </a:xfrm>
+          <a:prstGeom prst="roundRect">
+            <a:avLst>
+              <a:gd fmla="val 2799" name="adj"/>
+            </a:avLst>
+          </a:prstGeom>
+          <a:solidFill>
+            <a:srgbClr val="FFFFFF"/>
+          </a:solidFill>
+          <a:ln cap="flat" cmpd="sng" w="9525">
+            <a:solidFill>
+              <a:srgbClr val="A7C142"/>
+            </a:solidFill>
+            <a:prstDash val="solid"/>
+            <a:round/>
+            <a:headEnd len="sm" w="sm" type="none"/>
+            <a:tailEnd len="sm" w="sm" type="none"/>
+          </a:ln>
+        </p:spPr>
+        <p:txBody>
+          <a:bodyPr anchorCtr="0" anchor="t" bIns="0" lIns="0" spcFirstLastPara="1" rIns="0" wrap="square" tIns="0">
+            <a:noAutofit/>
+          </a:bodyPr>
+          <a:lstStyle/>
+          <a:p>
+            <a:pPr indent="0" lvl="0" marL="0" marR="0" rtl="0" algn="l">
+              <a:spcBef>
+                <a:spcPts val="0"/>
+              </a:spcBef>
+              <a:spcAft>
+                <a:spcPts val="0"/>
+              </a:spcAft>
+              <a:buNone/>
+            </a:pPr>
+            <a:r>
+              <a:rPr b="0" i="0" lang="en" sz="900">
                 <a:solidFill>
                   <a:srgbClr val="666666"/>
                 </a:solidFill>
-                <a:latin typeface="Inter"/>
-                <a:ea typeface="Inter"/>
-                <a:cs typeface="Inter"/>
-                <a:sym typeface="Inter"/>
+                <a:latin typeface="Arial"/>
+                <a:ea typeface="Arial"/>
+                <a:cs typeface="Arial"/>
+                <a:sym typeface="Arial"/>
+              </a:rPr>
+              <a:t/>
+            </a:r>
+            <a:endParaRPr sz="900"/>
+          </a:p>
+        </p:txBody>
+      </p:sp>
+      <p:sp>
+        <p:nvSpPr>
+          <p:cNvPr id="101" name="Google Shape;101;p16"/>
+          <p:cNvSpPr/>
+          <p:nvPr/>
+        </p:nvSpPr>
+        <p:spPr>
+          <a:xfrm>
+            <a:off x="658368" y="3749040"/>
+            <a:ext cx="7827264" cy="164592"/>
+          </a:xfrm>
+          <a:prstGeom prst="rect">
+            <a:avLst/>
+          </a:prstGeom>
+          <a:noFill/>
+          <a:ln>
+            <a:noFill/>
+          </a:ln>
+        </p:spPr>
+        <p:txBody>
+          <a:bodyPr anchorCtr="0" anchor="ctr" bIns="0" lIns="0" spcFirstLastPara="1" rIns="0" wrap="square" tIns="0">
+            <a:noAutofit/>
+          </a:bodyPr>
+          <a:lstStyle/>
+          <a:p>
+            <a:pPr indent="0" lvl="0" marL="0" marR="0" rtl="0" algn="l">
+              <a:spcBef>
+                <a:spcPts val="0"/>
+              </a:spcBef>
+              <a:spcAft>
+                <a:spcPts val="0"/>
+              </a:spcAft>
+              <a:buNone/>
+            </a:pPr>
+            <a:r>
+              <a:rPr b="1" i="0" lang="en" sz="900">
+                <a:solidFill>
+                  <a:srgbClr val="003726"/>
+                </a:solidFill>
+                <a:latin typeface="Arial"/>
+                <a:ea typeface="Arial"/>
+                <a:cs typeface="Arial"/>
+                <a:sym typeface="Arial"/>
+              </a:rPr>
+              <a:t>Cross-Channel Retargeting</a:t>
+            </a:r>
+            <a:endParaRPr sz="900"/>
+          </a:p>
+        </p:txBody>
+      </p:sp>
+      <p:sp>
+        <p:nvSpPr>
+          <p:cNvPr id="102" name="Google Shape;102;p16"/>
+          <p:cNvSpPr/>
+          <p:nvPr/>
+        </p:nvSpPr>
+        <p:spPr>
+          <a:xfrm>
+            <a:off x="658368" y="3986784"/>
+            <a:ext cx="7827264" cy="457200"/>
+          </a:xfrm>
+          <a:prstGeom prst="rect">
+            <a:avLst/>
+          </a:prstGeom>
+          <a:noFill/>
+          <a:ln>
+            <a:noFill/>
+          </a:ln>
+        </p:spPr>
+        <p:txBody>
+          <a:bodyPr anchorCtr="0" anchor="t" bIns="0" lIns="0" spcFirstLastPara="1" rIns="0" wrap="square" tIns="0">
+            <a:noAutofit/>
+          </a:bodyPr>
+          <a:lstStyle/>
+          <a:p>
+            <a:pPr indent="-152400" lvl="0" marL="152400" marR="0" rtl="0" algn="l">
+              <a:spcBef>
+                <a:spcPts val="0"/>
+              </a:spcBef>
+              <a:spcAft>
+                <a:spcPts val="400"/>
+              </a:spcAft>
+              <a:buClr>
+                <a:srgbClr val="00823D"/>
+              </a:buClr>
+              <a:buSzPts val="700"/>
+              <a:buFont typeface="Arial"/>
+              <a:buChar char="●"/>
+            </a:pPr>
+            <a:r>
+              <a:rPr b="1" i="0" lang="en" sz="800">
+                <a:solidFill>
+                  <a:srgbClr val="003726"/>
+                </a:solidFill>
+                <a:latin typeface="Arial"/>
+                <a:ea typeface="Arial"/>
+                <a:cs typeface="Arial"/>
+                <a:sym typeface="Arial"/>
               </a:rPr>
               <a:t>Microsoft IMBR:</a:t>
             </a:r>
             <a:r>
-              <a:rPr b="0" i="0" lang="en" sz="600" u="none" cap="none" strike="noStrike">
+              <a:rPr b="0" i="0" lang="en" sz="800">
                 <a:solidFill>
                   <a:srgbClr val="666666"/>
                 </a:solidFill>
-                <a:latin typeface="Inter"/>
-                <a:ea typeface="Inter"/>
-                <a:cs typeface="Inter"/>
-                <a:sym typeface="Inter"/>
+                <a:latin typeface="Arial"/>
+                <a:ea typeface="Arial"/>
+                <a:cs typeface="Arial"/>
+                <a:sym typeface="Arial"/>
               </a:rPr>
               <a:t> Retarget TV viewers with follow-up Search, Native, or Display ads</a:t>
             </a:r>
-            <a:endParaRPr b="0" i="0" sz="600" u="none" cap="none" strike="noStrike">
-              <a:solidFill>
-                <a:schemeClr val="dk1"/>
-              </a:solidFill>
-              <a:latin typeface="Arial"/>
-              <a:ea typeface="Arial"/>
-              <a:cs typeface="Arial"/>
-              <a:sym typeface="Arial"/>
-            </a:endParaRPr>
-          </a:p>
-          <a:p>
-            <a:pPr indent="-114300" lvl="0" marL="114300" marR="0" rtl="0" algn="l">
-              <a:lnSpc>
-                <a:spcPct val="101000"/>
-              </a:lnSpc>
+            <a:endParaRPr sz="800"/>
+          </a:p>
+          <a:p>
+            <a:pPr indent="-152400" lvl="0" marL="152400" marR="0" rtl="0" algn="l">
               <a:spcBef>
                 <a:spcPts val="0"/>
               </a:spcBef>
@@ -8027,45 +8846,37 @@
                 <a:spcPts val="0"/>
               </a:spcAft>
               <a:buClr>
-                <a:srgbClr val="666666"/>
+                <a:srgbClr val="00823D"/>
               </a:buClr>
-              <a:buSzPts val="600"/>
-              <a:buFont typeface="Inter"/>
-              <a:buChar char="•"/>
-            </a:pPr>
-            <a:r>
-              <a:rPr b="1" i="0" lang="en" sz="600" u="none" cap="none" strike="noStrike">
+              <a:buSzPts val="700"/>
+              <a:buFont typeface="Arial"/>
+              <a:buChar char="●"/>
+            </a:pPr>
+            <a:r>
+              <a:rPr b="1" i="0" lang="en" sz="800">
+                <a:solidFill>
+                  <a:srgbClr val="003726"/>
+                </a:solidFill>
+                <a:latin typeface="Arial"/>
+                <a:ea typeface="Arial"/>
+                <a:cs typeface="Arial"/>
+                <a:sym typeface="Arial"/>
+              </a:rPr>
+              <a:t>Google Demand Gen:</a:t>
+            </a:r>
+            <a:r>
+              <a:rPr b="0" i="0" lang="en" sz="800">
                 <a:solidFill>
                   <a:srgbClr val="666666"/>
                 </a:solidFill>
-                <a:latin typeface="Inter"/>
-                <a:ea typeface="Inter"/>
-                <a:cs typeface="Inter"/>
-                <a:sym typeface="Inter"/>
-              </a:rPr>
-              <a:t>Google Demand Gen:</a:t>
-            </a:r>
-            <a:r>
-              <a:rPr b="0" i="0" lang="en" sz="600" u="none" cap="none" strike="noStrike">
-                <a:solidFill>
-                  <a:srgbClr val="666666"/>
-                </a:solidFill>
-                <a:latin typeface="Inter"/>
-                <a:ea typeface="Inter"/>
-                <a:cs typeface="Inter"/>
-                <a:sym typeface="Inter"/>
+                <a:latin typeface="Arial"/>
+                <a:ea typeface="Arial"/>
+                <a:cs typeface="Arial"/>
+                <a:sym typeface="Arial"/>
               </a:rPr>
               <a:t> Re-engage warm streaming audiences across YouTube Shorts, Gmail, and Discover</a:t>
             </a:r>
-            <a:endParaRPr b="0" i="0" sz="600" u="none" cap="none" strike="noStrike">
-              <a:solidFill>
-                <a:schemeClr val="dk1"/>
-              </a:solidFill>
-              <a:latin typeface="Arial"/>
-              <a:ea typeface="Arial"/>
-              <a:cs typeface="Arial"/>
-              <a:sym typeface="Arial"/>
-            </a:endParaRPr>
+            <a:endParaRPr sz="800"/>
           </a:p>
         </p:txBody>
       </p:sp>
@@ -16504,7 +17315,7 @@
                 <a:cs typeface="Arial"/>
                 <a:sym typeface="Arial"/>
               </a:rPr>
-              <a:t>Cross Device</a:t>
+              <a:t>42+ inch TV Screens</a:t>
             </a:r>
             <a:endParaRPr sz="1500">
               <a:solidFill>

--- a/tri-peaks-camp-redesign/Tri_Peaks_Pitch_Test_CAMP_Design.pptx
+++ b/tri-peaks-camp-redesign/Tri_Peaks_Pitch_Test_CAMP_Design.pptx
@@ -7706,13 +7706,400 @@
         </p:nvSpPr>
         <p:spPr>
           <a:xfrm>
-            <a:off x="429768" y="932688"/>
-            <a:ext cx="2578608" cy="1389888"/>
-          </a:xfrm>
-          <a:prstGeom prst="roundRect">
+            <a:off x="1190291" y="1700784"/>
+            <a:ext cx="2706624" cy="2706624"/>
+          </a:xfrm>
+          <a:prstGeom prst="arc">
             <a:avLst>
-              <a:gd fmla="val 2799" name="adj"/>
+              <a:gd fmla="val 18480000" name="adj1"/>
+              <a:gd fmla="val 21120000" name="adj2"/>
             </a:avLst>
+          </a:prstGeom>
+          <a:noFill/>
+          <a:ln cap="flat" cmpd="sng" w="14300">
+            <a:solidFill>
+              <a:srgbClr val="003726"/>
+            </a:solidFill>
+            <a:prstDash val="solid"/>
+            <a:round/>
+            <a:headEnd len="sm" w="sm" type="none"/>
+            <a:tailEnd len="med" w="med" type="triangle"/>
+          </a:ln>
+        </p:spPr>
+        <p:txBody>
+          <a:bodyPr anchorCtr="0" anchor="t" bIns="0" lIns="0" spcFirstLastPara="1" rIns="0" wrap="square" tIns="0">
+            <a:noAutofit/>
+          </a:bodyPr>
+          <a:lstStyle/>
+          <a:p>
+            <a:pPr indent="0" lvl="0" marL="0" marR="0" rtl="0" algn="l">
+              <a:spcBef>
+                <a:spcPts val="0"/>
+              </a:spcBef>
+              <a:spcAft>
+                <a:spcPts val="0"/>
+              </a:spcAft>
+              <a:buNone/>
+            </a:pPr>
+            <a:r>
+              <a:rPr b="0" i="0" lang="en" sz="900">
+                <a:solidFill>
+                  <a:srgbClr val="666666"/>
+                </a:solidFill>
+                <a:latin typeface="Arial"/>
+                <a:ea typeface="Arial"/>
+                <a:cs typeface="Arial"/>
+                <a:sym typeface="Arial"/>
+              </a:rPr>
+              <a:t/>
+            </a:r>
+            <a:endParaRPr sz="900"/>
+          </a:p>
+        </p:txBody>
+      </p:sp>
+      <p:sp>
+        <p:nvSpPr>
+          <p:cNvPr id="83" name="Google Shape;83;p16"/>
+          <p:cNvSpPr/>
+          <p:nvPr/>
+        </p:nvSpPr>
+        <p:spPr>
+          <a:xfrm>
+            <a:off x="3665313" y="2327148"/>
+            <a:ext cx="100584" cy="100584"/>
+          </a:xfrm>
+          <a:prstGeom prst="ellipse">
+            <a:avLst/>
+          </a:prstGeom>
+          <a:solidFill>
+            <a:srgbClr val="00823D"/>
+          </a:solidFill>
+          <a:ln>
+            <a:noFill/>
+          </a:ln>
+        </p:spPr>
+        <p:txBody>
+          <a:bodyPr anchorCtr="0" anchor="t" bIns="0" lIns="0" spcFirstLastPara="1" rIns="0" wrap="square" tIns="0">
+            <a:noAutofit/>
+          </a:bodyPr>
+          <a:lstStyle/>
+          <a:p>
+            <a:pPr indent="0" lvl="0" marL="0" marR="0" rtl="0" algn="l">
+              <a:spcBef>
+                <a:spcPts val="0"/>
+              </a:spcBef>
+              <a:spcAft>
+                <a:spcPts val="0"/>
+              </a:spcAft>
+              <a:buNone/>
+            </a:pPr>
+            <a:r>
+              <a:rPr b="0" i="0" lang="en" sz="900">
+                <a:solidFill>
+                  <a:srgbClr val="666666"/>
+                </a:solidFill>
+                <a:latin typeface="Arial"/>
+                <a:ea typeface="Arial"/>
+                <a:cs typeface="Arial"/>
+                <a:sym typeface="Arial"/>
+              </a:rPr>
+              <a:t/>
+            </a:r>
+            <a:endParaRPr sz="900"/>
+          </a:p>
+        </p:txBody>
+      </p:sp>
+      <p:sp>
+        <p:nvSpPr>
+          <p:cNvPr id="84" name="Google Shape;84;p16"/>
+          <p:cNvSpPr/>
+          <p:nvPr/>
+        </p:nvSpPr>
+        <p:spPr>
+          <a:xfrm>
+            <a:off x="1190291" y="1700784"/>
+            <a:ext cx="2706624" cy="2706624"/>
+          </a:xfrm>
+          <a:prstGeom prst="arc">
+            <a:avLst>
+              <a:gd fmla="val 4080000" name="adj1"/>
+              <a:gd fmla="val 6720000" name="adj2"/>
+            </a:avLst>
+          </a:prstGeom>
+          <a:noFill/>
+          <a:ln cap="flat" cmpd="sng" w="14300">
+            <a:solidFill>
+              <a:srgbClr val="003726"/>
+            </a:solidFill>
+            <a:prstDash val="solid"/>
+            <a:round/>
+            <a:headEnd len="sm" w="sm" type="none"/>
+            <a:tailEnd len="med" w="med" type="triangle"/>
+          </a:ln>
+        </p:spPr>
+        <p:txBody>
+          <a:bodyPr anchorCtr="0" anchor="t" bIns="0" lIns="0" spcFirstLastPara="1" rIns="0" wrap="square" tIns="0">
+            <a:noAutofit/>
+          </a:bodyPr>
+          <a:lstStyle/>
+          <a:p>
+            <a:pPr indent="0" lvl="0" marL="0" marR="0" rtl="0" algn="l">
+              <a:spcBef>
+                <a:spcPts val="0"/>
+              </a:spcBef>
+              <a:spcAft>
+                <a:spcPts val="0"/>
+              </a:spcAft>
+              <a:buNone/>
+            </a:pPr>
+            <a:r>
+              <a:rPr b="0" i="0" lang="en" sz="900">
+                <a:solidFill>
+                  <a:srgbClr val="666666"/>
+                </a:solidFill>
+                <a:latin typeface="Arial"/>
+                <a:ea typeface="Arial"/>
+                <a:cs typeface="Arial"/>
+                <a:sym typeface="Arial"/>
+              </a:rPr>
+              <a:t/>
+            </a:r>
+            <a:endParaRPr sz="900"/>
+          </a:p>
+        </p:txBody>
+      </p:sp>
+      <p:sp>
+        <p:nvSpPr>
+          <p:cNvPr id="85" name="Google Shape;85;p16"/>
+          <p:cNvSpPr/>
+          <p:nvPr/>
+        </p:nvSpPr>
+        <p:spPr>
+          <a:xfrm>
+            <a:off x="2493311" y="4357116"/>
+            <a:ext cx="100584" cy="100584"/>
+          </a:xfrm>
+          <a:prstGeom prst="ellipse">
+            <a:avLst/>
+          </a:prstGeom>
+          <a:solidFill>
+            <a:srgbClr val="A7C142"/>
+          </a:solidFill>
+          <a:ln>
+            <a:noFill/>
+          </a:ln>
+        </p:spPr>
+        <p:txBody>
+          <a:bodyPr anchorCtr="0" anchor="t" bIns="0" lIns="0" spcFirstLastPara="1" rIns="0" wrap="square" tIns="0">
+            <a:noAutofit/>
+          </a:bodyPr>
+          <a:lstStyle/>
+          <a:p>
+            <a:pPr indent="0" lvl="0" marL="0" marR="0" rtl="0" algn="l">
+              <a:spcBef>
+                <a:spcPts val="0"/>
+              </a:spcBef>
+              <a:spcAft>
+                <a:spcPts val="0"/>
+              </a:spcAft>
+              <a:buNone/>
+            </a:pPr>
+            <a:r>
+              <a:rPr b="0" i="0" lang="en" sz="900">
+                <a:solidFill>
+                  <a:srgbClr val="666666"/>
+                </a:solidFill>
+                <a:latin typeface="Arial"/>
+                <a:ea typeface="Arial"/>
+                <a:cs typeface="Arial"/>
+                <a:sym typeface="Arial"/>
+              </a:rPr>
+              <a:t/>
+            </a:r>
+            <a:endParaRPr sz="900"/>
+          </a:p>
+        </p:txBody>
+      </p:sp>
+      <p:sp>
+        <p:nvSpPr>
+          <p:cNvPr id="86" name="Google Shape;86;p16"/>
+          <p:cNvSpPr/>
+          <p:nvPr/>
+        </p:nvSpPr>
+        <p:spPr>
+          <a:xfrm>
+            <a:off x="1190291" y="1700784"/>
+            <a:ext cx="2706624" cy="2706624"/>
+          </a:xfrm>
+          <a:prstGeom prst="arc">
+            <a:avLst>
+              <a:gd fmla="val 11280000" name="adj1"/>
+              <a:gd fmla="val 13920000" name="adj2"/>
+            </a:avLst>
+          </a:prstGeom>
+          <a:noFill/>
+          <a:ln cap="flat" cmpd="sng" w="14300">
+            <a:solidFill>
+              <a:srgbClr val="003726"/>
+            </a:solidFill>
+            <a:prstDash val="solid"/>
+            <a:round/>
+            <a:headEnd len="sm" w="sm" type="none"/>
+            <a:tailEnd len="med" w="med" type="triangle"/>
+          </a:ln>
+        </p:spPr>
+        <p:txBody>
+          <a:bodyPr anchorCtr="0" anchor="t" bIns="0" lIns="0" spcFirstLastPara="1" rIns="0" wrap="square" tIns="0">
+            <a:noAutofit/>
+          </a:bodyPr>
+          <a:lstStyle/>
+          <a:p>
+            <a:pPr indent="0" lvl="0" marL="0" marR="0" rtl="0" algn="l">
+              <a:spcBef>
+                <a:spcPts val="0"/>
+              </a:spcBef>
+              <a:spcAft>
+                <a:spcPts val="0"/>
+              </a:spcAft>
+              <a:buNone/>
+            </a:pPr>
+            <a:r>
+              <a:rPr b="0" i="0" lang="en" sz="900">
+                <a:solidFill>
+                  <a:srgbClr val="666666"/>
+                </a:solidFill>
+                <a:latin typeface="Arial"/>
+                <a:ea typeface="Arial"/>
+                <a:cs typeface="Arial"/>
+                <a:sym typeface="Arial"/>
+              </a:rPr>
+              <a:t/>
+            </a:r>
+            <a:endParaRPr sz="900"/>
+          </a:p>
+        </p:txBody>
+      </p:sp>
+      <p:sp>
+        <p:nvSpPr>
+          <p:cNvPr id="87" name="Google Shape;87;p16"/>
+          <p:cNvSpPr/>
+          <p:nvPr/>
+        </p:nvSpPr>
+        <p:spPr>
+          <a:xfrm>
+            <a:off x="1321308" y="2327148"/>
+            <a:ext cx="100584" cy="100584"/>
+          </a:xfrm>
+          <a:prstGeom prst="ellipse">
+            <a:avLst/>
+          </a:prstGeom>
+          <a:solidFill>
+            <a:srgbClr val="003726"/>
+          </a:solidFill>
+          <a:ln>
+            <a:noFill/>
+          </a:ln>
+        </p:spPr>
+        <p:txBody>
+          <a:bodyPr anchorCtr="0" anchor="t" bIns="0" lIns="0" spcFirstLastPara="1" rIns="0" wrap="square" tIns="0">
+            <a:noAutofit/>
+          </a:bodyPr>
+          <a:lstStyle/>
+          <a:p>
+            <a:pPr indent="0" lvl="0" marL="0" marR="0" rtl="0" algn="l">
+              <a:spcBef>
+                <a:spcPts val="0"/>
+              </a:spcBef>
+              <a:spcAft>
+                <a:spcPts val="0"/>
+              </a:spcAft>
+              <a:buNone/>
+            </a:pPr>
+            <a:r>
+              <a:rPr b="0" i="0" lang="en" sz="900">
+                <a:solidFill>
+                  <a:srgbClr val="666666"/>
+                </a:solidFill>
+                <a:latin typeface="Arial"/>
+                <a:ea typeface="Arial"/>
+                <a:cs typeface="Arial"/>
+                <a:sym typeface="Arial"/>
+              </a:rPr>
+              <a:t/>
+            </a:r>
+            <a:endParaRPr sz="900"/>
+          </a:p>
+        </p:txBody>
+      </p:sp>
+      <p:sp>
+        <p:nvSpPr>
+          <p:cNvPr id="88" name="Google Shape;88;p16"/>
+          <p:cNvSpPr/>
+          <p:nvPr/>
+        </p:nvSpPr>
+        <p:spPr>
+          <a:xfrm>
+            <a:off x="1720643" y="877824"/>
+            <a:ext cx="1645920" cy="1645920"/>
+          </a:xfrm>
+          <a:prstGeom prst="ellipse">
+            <a:avLst/>
+          </a:prstGeom>
+          <a:noFill/>
+          <a:ln cap="flat" cmpd="sng" w="9525">
+            <a:solidFill>
+              <a:srgbClr val="A7C142"/>
+            </a:solidFill>
+            <a:prstDash val="sysDot"/>
+            <a:round/>
+            <a:headEnd len="sm" w="sm" type="none"/>
+            <a:tailEnd len="sm" w="sm" type="none"/>
+          </a:ln>
+        </p:spPr>
+        <p:txBody>
+          <a:bodyPr anchorCtr="0" anchor="t" bIns="0" lIns="0" spcFirstLastPara="1" rIns="0" wrap="square" tIns="0">
+            <a:noAutofit/>
+          </a:bodyPr>
+          <a:lstStyle/>
+          <a:p>
+            <a:pPr indent="0" lvl="0" marL="0" marR="0" rtl="0" algn="l">
+              <a:spcBef>
+                <a:spcPts val="0"/>
+              </a:spcBef>
+              <a:spcAft>
+                <a:spcPts val="0"/>
+              </a:spcAft>
+              <a:buNone/>
+            </a:pPr>
+            <a:r>
+              <a:rPr b="0" i="0" lang="en" sz="900">
+                <a:solidFill>
+                  <a:srgbClr val="666666"/>
+                </a:solidFill>
+                <a:latin typeface="Arial"/>
+                <a:ea typeface="Arial"/>
+                <a:cs typeface="Arial"/>
+                <a:sym typeface="Arial"/>
+              </a:rPr>
+              <a:t/>
+            </a:r>
+            <a:endParaRPr sz="900"/>
+          </a:p>
+        </p:txBody>
+      </p:sp>
+      <p:sp>
+        <p:nvSpPr>
+          <p:cNvPr id="89" name="Google Shape;89;p16"/>
+          <p:cNvSpPr/>
+          <p:nvPr/>
+        </p:nvSpPr>
+        <p:spPr>
+          <a:xfrm>
+            <a:off x="1812083" y="969264"/>
+            <a:ext cx="1463040" cy="1463040"/>
+          </a:xfrm>
+          <a:prstGeom prst="ellipse">
+            <a:avLst/>
           </a:prstGeom>
           <a:solidFill>
             <a:srgbClr val="FFFFFF"/>
@@ -7760,14 +8147,14 @@
       </p:sp>
       <p:sp>
         <p:nvSpPr>
-          <p:cNvPr id="83" name="Google Shape;83;p16"/>
-          <p:cNvSpPr/>
-          <p:nvPr/>
-        </p:nvSpPr>
-        <p:spPr>
-          <a:xfrm>
-            <a:off x="1636776" y="1170432"/>
-            <a:ext cx="164592" cy="164592"/>
+          <p:cNvPr id="90" name="Google Shape;90;p16"/>
+          <p:cNvSpPr/>
+          <p:nvPr/>
+        </p:nvSpPr>
+        <p:spPr>
+          <a:xfrm>
+            <a:off x="2493311" y="827532"/>
+            <a:ext cx="100584" cy="100584"/>
           </a:xfrm>
           <a:prstGeom prst="ellipse">
             <a:avLst/>
@@ -7812,129 +8199,27 @@
       </p:sp>
       <p:sp>
         <p:nvSpPr>
-          <p:cNvPr id="84" name="Google Shape;84;p16"/>
-          <p:cNvSpPr/>
-          <p:nvPr/>
-        </p:nvSpPr>
-        <p:spPr>
-          <a:xfrm>
-            <a:off x="576072" y="1389888"/>
-            <a:ext cx="2286000" cy="402336"/>
-          </a:xfrm>
-          <a:prstGeom prst="rect">
+          <p:cNvPr id="91" name="Google Shape;91;p16"/>
+          <p:cNvSpPr/>
+          <p:nvPr/>
+        </p:nvSpPr>
+        <p:spPr>
+          <a:xfrm>
+            <a:off x="2406443" y="1133856"/>
+            <a:ext cx="274320" cy="274320"/>
+          </a:xfrm>
+          <a:prstGeom prst="diamond">
             <a:avLst/>
           </a:prstGeom>
           <a:noFill/>
-          <a:ln>
-            <a:noFill/>
-          </a:ln>
-        </p:spPr>
-        <p:txBody>
-          <a:bodyPr anchorCtr="0" anchor="b" bIns="0" lIns="0" spcFirstLastPara="1" rIns="0" wrap="square" tIns="0">
-            <a:noAutofit/>
-          </a:bodyPr>
-          <a:lstStyle/>
-          <a:p>
-            <a:pPr indent="0" lvl="0" marL="0" marR="0" rtl="0" algn="ctr">
-              <a:lnSpc>
-                <a:spcPct val="100000"/>
-              </a:lnSpc>
-              <a:spcBef>
-                <a:spcPts val="0"/>
-              </a:spcBef>
-              <a:spcAft>
-                <a:spcPts val="0"/>
-              </a:spcAft>
-              <a:buNone/>
-            </a:pPr>
-            <a:r>
-              <a:rPr b="1" i="0" lang="en" sz="1100">
-                <a:solidFill>
-                  <a:srgbClr val="003726"/>
-                </a:solidFill>
-                <a:latin typeface="Arial"/>
-                <a:ea typeface="Arial"/>
-                <a:cs typeface="Arial"/>
-                <a:sym typeface="Arial"/>
-              </a:rPr>
-              <a:t>CTV Awareness</a:t>
-            </a:r>
-            <a:endParaRPr sz="1100"/>
-          </a:p>
-        </p:txBody>
-      </p:sp>
-      <p:sp>
-        <p:nvSpPr>
-          <p:cNvPr id="85" name="Google Shape;85;p16"/>
-          <p:cNvSpPr/>
-          <p:nvPr/>
-        </p:nvSpPr>
-        <p:spPr>
-          <a:xfrm>
-            <a:off x="576072" y="1819656"/>
-            <a:ext cx="2286000" cy="420624"/>
-          </a:xfrm>
-          <a:prstGeom prst="rect">
-            <a:avLst/>
-          </a:prstGeom>
-          <a:noFill/>
-          <a:ln>
-            <a:noFill/>
-          </a:ln>
-        </p:spPr>
-        <p:txBody>
-          <a:bodyPr anchorCtr="0" anchor="t" bIns="0" lIns="0" spcFirstLastPara="1" rIns="0" wrap="square" tIns="0">
-            <a:noAutofit/>
-          </a:bodyPr>
-          <a:lstStyle/>
-          <a:p>
-            <a:pPr indent="0" lvl="0" marL="0" marR="0" rtl="0" algn="ctr">
-              <a:lnSpc>
-                <a:spcPct val="100000"/>
-              </a:lnSpc>
-              <a:spcBef>
-                <a:spcPts val="0"/>
-              </a:spcBef>
-              <a:spcAft>
-                <a:spcPts val="0"/>
-              </a:spcAft>
-              <a:buNone/>
-            </a:pPr>
-            <a:r>
-              <a:rPr b="0" i="0" lang="en" sz="800">
-                <a:solidFill>
-                  <a:srgbClr val="666666"/>
-                </a:solidFill>
-                <a:latin typeface="Arial"/>
-                <a:ea typeface="Arial"/>
-                <a:cs typeface="Arial"/>
-                <a:sym typeface="Arial"/>
-              </a:rPr>
-              <a:t>(top-of-mind brand trust on living room screens)</a:t>
-            </a:r>
-            <a:endParaRPr sz="800"/>
-          </a:p>
-        </p:txBody>
-      </p:sp>
-      <p:sp>
-        <p:nvSpPr>
-          <p:cNvPr id="86" name="Google Shape;86;p16"/>
-          <p:cNvSpPr/>
-          <p:nvPr/>
-        </p:nvSpPr>
-        <p:spPr>
-          <a:xfrm rot="5400000">
-            <a:off x="3063240" y="1536192"/>
-            <a:ext cx="164592" cy="182880"/>
-          </a:xfrm>
-          <a:prstGeom prst="triangle">
-            <a:avLst/>
-          </a:prstGeom>
-          <a:solidFill>
-            <a:srgbClr val="A7C142"/>
-          </a:solidFill>
-          <a:ln>
-            <a:noFill/>
+          <a:ln cap="flat" cmpd="sng" w="9525">
+            <a:solidFill>
+              <a:srgbClr val="003726"/>
+            </a:solidFill>
+            <a:prstDash val="solid"/>
+            <a:round/>
+            <a:headEnd len="sm" w="sm" type="none"/>
+            <a:tailEnd len="sm" w="sm" type="none"/>
           </a:ln>
         </p:spPr>
         <p:txBody>
@@ -7970,19 +8255,179 @@
       </p:sp>
       <p:sp>
         <p:nvSpPr>
-          <p:cNvPr id="87" name="Google Shape;87;p16"/>
-          <p:cNvSpPr/>
-          <p:nvPr/>
-        </p:nvSpPr>
-        <p:spPr>
-          <a:xfrm>
-            <a:off x="3282696" y="932688"/>
-            <a:ext cx="2578608" cy="1389888"/>
-          </a:xfrm>
-          <a:prstGeom prst="roundRect">
-            <a:avLst>
-              <a:gd fmla="val 2799" name="adj"/>
-            </a:avLst>
+          <p:cNvPr id="92" name="Google Shape;92;p16"/>
+          <p:cNvSpPr/>
+          <p:nvPr/>
+        </p:nvSpPr>
+        <p:spPr>
+          <a:xfrm>
+            <a:off x="1894379" y="1426464"/>
+            <a:ext cx="1298448" cy="420624"/>
+          </a:xfrm>
+          <a:prstGeom prst="rect">
+            <a:avLst/>
+          </a:prstGeom>
+          <a:noFill/>
+          <a:ln>
+            <a:noFill/>
+          </a:ln>
+        </p:spPr>
+        <p:txBody>
+          <a:bodyPr anchorCtr="0" anchor="b" bIns="0" lIns="0" spcFirstLastPara="1" rIns="0" wrap="square" tIns="0">
+            <a:noAutofit/>
+          </a:bodyPr>
+          <a:lstStyle/>
+          <a:p>
+            <a:pPr indent="0" lvl="0" marL="0" marR="0" rtl="0" algn="ctr">
+              <a:lnSpc>
+                <a:spcPct val="100000"/>
+              </a:lnSpc>
+              <a:spcBef>
+                <a:spcPts val="0"/>
+              </a:spcBef>
+              <a:spcAft>
+                <a:spcPts val="0"/>
+              </a:spcAft>
+              <a:buNone/>
+            </a:pPr>
+            <a:r>
+              <a:rPr b="1" i="0" lang="en" sz="800">
+                <a:solidFill>
+                  <a:srgbClr val="003726"/>
+                </a:solidFill>
+                <a:latin typeface="Arial"/>
+                <a:ea typeface="Arial"/>
+                <a:cs typeface="Arial"/>
+                <a:sym typeface="Arial"/>
+              </a:rPr>
+              <a:t>CTV Awareness</a:t>
+            </a:r>
+            <a:endParaRPr sz="800"/>
+          </a:p>
+        </p:txBody>
+      </p:sp>
+      <p:sp>
+        <p:nvSpPr>
+          <p:cNvPr id="93" name="Google Shape;93;p16"/>
+          <p:cNvSpPr/>
+          <p:nvPr/>
+        </p:nvSpPr>
+        <p:spPr>
+          <a:xfrm>
+            <a:off x="1967531" y="1865376"/>
+            <a:ext cx="1152144" cy="347472"/>
+          </a:xfrm>
+          <a:prstGeom prst="rect">
+            <a:avLst/>
+          </a:prstGeom>
+          <a:noFill/>
+          <a:ln>
+            <a:noFill/>
+          </a:ln>
+        </p:spPr>
+        <p:txBody>
+          <a:bodyPr anchorCtr="0" anchor="t" bIns="0" lIns="0" spcFirstLastPara="1" rIns="0" wrap="square" tIns="0">
+            <a:noAutofit/>
+          </a:bodyPr>
+          <a:lstStyle/>
+          <a:p>
+            <a:pPr indent="0" lvl="0" marL="0" marR="0" rtl="0" algn="ctr">
+              <a:lnSpc>
+                <a:spcPct val="100000"/>
+              </a:lnSpc>
+              <a:spcBef>
+                <a:spcPts val="0"/>
+              </a:spcBef>
+              <a:spcAft>
+                <a:spcPts val="0"/>
+              </a:spcAft>
+              <a:buNone/>
+            </a:pPr>
+            <a:r>
+              <a:rPr b="0" i="0" lang="en" sz="700">
+                <a:solidFill>
+                  <a:srgbClr val="666666"/>
+                </a:solidFill>
+                <a:latin typeface="Arial"/>
+                <a:ea typeface="Arial"/>
+                <a:cs typeface="Arial"/>
+                <a:sym typeface="Arial"/>
+              </a:rPr>
+              <a:t>(top-of-mind brand trust on living room screens)</a:t>
+            </a:r>
+            <a:endParaRPr sz="700"/>
+          </a:p>
+        </p:txBody>
+      </p:sp>
+      <p:sp>
+        <p:nvSpPr>
+          <p:cNvPr id="94" name="Google Shape;94;p16"/>
+          <p:cNvSpPr/>
+          <p:nvPr/>
+        </p:nvSpPr>
+        <p:spPr>
+          <a:xfrm>
+            <a:off x="2892645" y="2907792"/>
+            <a:ext cx="1645920" cy="1645920"/>
+          </a:xfrm>
+          <a:prstGeom prst="ellipse">
+            <a:avLst/>
+          </a:prstGeom>
+          <a:noFill/>
+          <a:ln cap="flat" cmpd="sng" w="9525">
+            <a:solidFill>
+              <a:srgbClr val="A7C142"/>
+            </a:solidFill>
+            <a:prstDash val="sysDot"/>
+            <a:round/>
+            <a:headEnd len="sm" w="sm" type="none"/>
+            <a:tailEnd len="sm" w="sm" type="none"/>
+          </a:ln>
+        </p:spPr>
+        <p:txBody>
+          <a:bodyPr anchorCtr="0" anchor="t" bIns="0" lIns="0" spcFirstLastPara="1" rIns="0" wrap="square" tIns="0">
+            <a:noAutofit/>
+          </a:bodyPr>
+          <a:lstStyle/>
+          <a:p>
+            <a:pPr indent="0" lvl="0" marL="0" marR="0" rtl="0" algn="l">
+              <a:spcBef>
+                <a:spcPts val="0"/>
+              </a:spcBef>
+              <a:spcAft>
+                <a:spcPts val="0"/>
+              </a:spcAft>
+              <a:buNone/>
+            </a:pPr>
+            <a:r>
+              <a:rPr b="0" i="0" lang="en" sz="900">
+                <a:solidFill>
+                  <a:srgbClr val="666666"/>
+                </a:solidFill>
+                <a:latin typeface="Arial"/>
+                <a:ea typeface="Arial"/>
+                <a:cs typeface="Arial"/>
+                <a:sym typeface="Arial"/>
+              </a:rPr>
+              <a:t/>
+            </a:r>
+            <a:endParaRPr sz="900"/>
+          </a:p>
+        </p:txBody>
+      </p:sp>
+      <p:sp>
+        <p:nvSpPr>
+          <p:cNvPr id="95" name="Google Shape;95;p16"/>
+          <p:cNvSpPr/>
+          <p:nvPr/>
+        </p:nvSpPr>
+        <p:spPr>
+          <a:xfrm>
+            <a:off x="2984085" y="2999232"/>
+            <a:ext cx="1463040" cy="1463040"/>
+          </a:xfrm>
+          <a:prstGeom prst="ellipse">
+            <a:avLst/>
           </a:prstGeom>
           <a:solidFill>
             <a:srgbClr val="FFFFFF"/>
@@ -8030,20 +8475,20 @@
       </p:sp>
       <p:sp>
         <p:nvSpPr>
-          <p:cNvPr id="88" name="Google Shape;88;p16"/>
-          <p:cNvSpPr/>
-          <p:nvPr/>
-        </p:nvSpPr>
-        <p:spPr>
-          <a:xfrm>
-            <a:off x="4489704" y="1170432"/>
-            <a:ext cx="164592" cy="164592"/>
+          <p:cNvPr id="96" name="Google Shape;96;p16"/>
+          <p:cNvSpPr/>
+          <p:nvPr/>
+        </p:nvSpPr>
+        <p:spPr>
+          <a:xfrm>
+            <a:off x="3665313" y="2857500"/>
+            <a:ext cx="100584" cy="100584"/>
           </a:xfrm>
           <a:prstGeom prst="ellipse">
             <a:avLst/>
           </a:prstGeom>
           <a:solidFill>
-            <a:srgbClr val="A7C142"/>
+            <a:srgbClr val="003726"/>
           </a:solidFill>
           <a:ln>
             <a:noFill/>
@@ -8082,129 +8527,27 @@
       </p:sp>
       <p:sp>
         <p:nvSpPr>
-          <p:cNvPr id="89" name="Google Shape;89;p16"/>
-          <p:cNvSpPr/>
-          <p:nvPr/>
-        </p:nvSpPr>
-        <p:spPr>
-          <a:xfrm>
-            <a:off x="3429000" y="1389888"/>
-            <a:ext cx="2286000" cy="402336"/>
-          </a:xfrm>
-          <a:prstGeom prst="rect">
+          <p:cNvPr id="97" name="Google Shape;97;p16"/>
+          <p:cNvSpPr/>
+          <p:nvPr/>
+        </p:nvSpPr>
+        <p:spPr>
+          <a:xfrm>
+            <a:off x="3578445" y="3163824"/>
+            <a:ext cx="274320" cy="274320"/>
+          </a:xfrm>
+          <a:prstGeom prst="hexagon">
             <a:avLst/>
           </a:prstGeom>
           <a:noFill/>
-          <a:ln>
-            <a:noFill/>
-          </a:ln>
-        </p:spPr>
-        <p:txBody>
-          <a:bodyPr anchorCtr="0" anchor="b" bIns="0" lIns="0" spcFirstLastPara="1" rIns="0" wrap="square" tIns="0">
-            <a:noAutofit/>
-          </a:bodyPr>
-          <a:lstStyle/>
-          <a:p>
-            <a:pPr indent="0" lvl="0" marL="0" marR="0" rtl="0" algn="ctr">
-              <a:lnSpc>
-                <a:spcPct val="100000"/>
-              </a:lnSpc>
-              <a:spcBef>
-                <a:spcPts val="0"/>
-              </a:spcBef>
-              <a:spcAft>
-                <a:spcPts val="0"/>
-              </a:spcAft>
-              <a:buNone/>
-            </a:pPr>
-            <a:r>
-              <a:rPr b="1" i="0" lang="en" sz="1100">
-                <a:solidFill>
-                  <a:srgbClr val="003726"/>
-                </a:solidFill>
-                <a:latin typeface="Arial"/>
-                <a:ea typeface="Arial"/>
-                <a:cs typeface="Arial"/>
-                <a:sym typeface="Arial"/>
-              </a:rPr>
-              <a:t>Branded Searches</a:t>
-            </a:r>
-            <a:endParaRPr sz="1100"/>
-          </a:p>
-        </p:txBody>
-      </p:sp>
-      <p:sp>
-        <p:nvSpPr>
-          <p:cNvPr id="90" name="Google Shape;90;p16"/>
-          <p:cNvSpPr/>
-          <p:nvPr/>
-        </p:nvSpPr>
-        <p:spPr>
-          <a:xfrm>
-            <a:off x="3429000" y="1819656"/>
-            <a:ext cx="2286000" cy="420624"/>
-          </a:xfrm>
-          <a:prstGeom prst="rect">
-            <a:avLst/>
-          </a:prstGeom>
-          <a:noFill/>
-          <a:ln>
-            <a:noFill/>
-          </a:ln>
-        </p:spPr>
-        <p:txBody>
-          <a:bodyPr anchorCtr="0" anchor="t" bIns="0" lIns="0" spcFirstLastPara="1" rIns="0" wrap="square" tIns="0">
-            <a:noAutofit/>
-          </a:bodyPr>
-          <a:lstStyle/>
-          <a:p>
-            <a:pPr indent="0" lvl="0" marL="0" marR="0" rtl="0" algn="ctr">
-              <a:lnSpc>
-                <a:spcPct val="100000"/>
-              </a:lnSpc>
-              <a:spcBef>
-                <a:spcPts val="0"/>
-              </a:spcBef>
-              <a:spcAft>
-                <a:spcPts val="0"/>
-              </a:spcAft>
-              <a:buNone/>
-            </a:pPr>
-            <a:r>
-              <a:rPr b="0" i="0" lang="en" sz="800">
-                <a:solidFill>
-                  <a:srgbClr val="666666"/>
-                </a:solidFill>
-                <a:latin typeface="Arial"/>
-                <a:ea typeface="Arial"/>
-                <a:cs typeface="Arial"/>
-                <a:sym typeface="Arial"/>
-              </a:rPr>
-              <a:t>(homeowners search your name directly)</a:t>
-            </a:r>
-            <a:endParaRPr sz="800"/>
-          </a:p>
-        </p:txBody>
-      </p:sp>
-      <p:sp>
-        <p:nvSpPr>
-          <p:cNvPr id="91" name="Google Shape;91;p16"/>
-          <p:cNvSpPr/>
-          <p:nvPr/>
-        </p:nvSpPr>
-        <p:spPr>
-          <a:xfrm rot="5400000">
-            <a:off x="5916168" y="1536192"/>
-            <a:ext cx="164592" cy="182880"/>
-          </a:xfrm>
-          <a:prstGeom prst="triangle">
-            <a:avLst/>
-          </a:prstGeom>
-          <a:solidFill>
-            <a:srgbClr val="A7C142"/>
-          </a:solidFill>
-          <a:ln>
-            <a:noFill/>
+          <a:ln cap="flat" cmpd="sng" w="9525">
+            <a:solidFill>
+              <a:srgbClr val="003726"/>
+            </a:solidFill>
+            <a:prstDash val="solid"/>
+            <a:round/>
+            <a:headEnd len="sm" w="sm" type="none"/>
+            <a:tailEnd len="sm" w="sm" type="none"/>
           </a:ln>
         </p:spPr>
         <p:txBody>
@@ -8240,19 +8583,179 @@
       </p:sp>
       <p:sp>
         <p:nvSpPr>
-          <p:cNvPr id="92" name="Google Shape;92;p16"/>
-          <p:cNvSpPr/>
-          <p:nvPr/>
-        </p:nvSpPr>
-        <p:spPr>
-          <a:xfrm>
-            <a:off x="6135624" y="932688"/>
-            <a:ext cx="2578608" cy="1389888"/>
-          </a:xfrm>
-          <a:prstGeom prst="roundRect">
-            <a:avLst>
-              <a:gd fmla="val 2799" name="adj"/>
-            </a:avLst>
+          <p:cNvPr id="98" name="Google Shape;98;p16"/>
+          <p:cNvSpPr/>
+          <p:nvPr/>
+        </p:nvSpPr>
+        <p:spPr>
+          <a:xfrm>
+            <a:off x="3066381" y="3456432"/>
+            <a:ext cx="1298448" cy="420624"/>
+          </a:xfrm>
+          <a:prstGeom prst="rect">
+            <a:avLst/>
+          </a:prstGeom>
+          <a:noFill/>
+          <a:ln>
+            <a:noFill/>
+          </a:ln>
+        </p:spPr>
+        <p:txBody>
+          <a:bodyPr anchorCtr="0" anchor="b" bIns="0" lIns="0" spcFirstLastPara="1" rIns="0" wrap="square" tIns="0">
+            <a:noAutofit/>
+          </a:bodyPr>
+          <a:lstStyle/>
+          <a:p>
+            <a:pPr indent="0" lvl="0" marL="0" marR="0" rtl="0" algn="ctr">
+              <a:lnSpc>
+                <a:spcPct val="100000"/>
+              </a:lnSpc>
+              <a:spcBef>
+                <a:spcPts val="0"/>
+              </a:spcBef>
+              <a:spcAft>
+                <a:spcPts val="0"/>
+              </a:spcAft>
+              <a:buNone/>
+            </a:pPr>
+            <a:r>
+              <a:rPr b="1" i="0" lang="en" sz="800">
+                <a:solidFill>
+                  <a:srgbClr val="003726"/>
+                </a:solidFill>
+                <a:latin typeface="Arial"/>
+                <a:ea typeface="Arial"/>
+                <a:cs typeface="Arial"/>
+                <a:sym typeface="Arial"/>
+              </a:rPr>
+              <a:t>Branded Searches</a:t>
+            </a:r>
+            <a:endParaRPr sz="800"/>
+          </a:p>
+        </p:txBody>
+      </p:sp>
+      <p:sp>
+        <p:nvSpPr>
+          <p:cNvPr id="99" name="Google Shape;99;p16"/>
+          <p:cNvSpPr/>
+          <p:nvPr/>
+        </p:nvSpPr>
+        <p:spPr>
+          <a:xfrm>
+            <a:off x="3139533" y="3895344"/>
+            <a:ext cx="1152144" cy="347472"/>
+          </a:xfrm>
+          <a:prstGeom prst="rect">
+            <a:avLst/>
+          </a:prstGeom>
+          <a:noFill/>
+          <a:ln>
+            <a:noFill/>
+          </a:ln>
+        </p:spPr>
+        <p:txBody>
+          <a:bodyPr anchorCtr="0" anchor="t" bIns="0" lIns="0" spcFirstLastPara="1" rIns="0" wrap="square" tIns="0">
+            <a:noAutofit/>
+          </a:bodyPr>
+          <a:lstStyle/>
+          <a:p>
+            <a:pPr indent="0" lvl="0" marL="0" marR="0" rtl="0" algn="ctr">
+              <a:lnSpc>
+                <a:spcPct val="100000"/>
+              </a:lnSpc>
+              <a:spcBef>
+                <a:spcPts val="0"/>
+              </a:spcBef>
+              <a:spcAft>
+                <a:spcPts val="0"/>
+              </a:spcAft>
+              <a:buNone/>
+            </a:pPr>
+            <a:r>
+              <a:rPr b="0" i="0" lang="en" sz="700">
+                <a:solidFill>
+                  <a:srgbClr val="666666"/>
+                </a:solidFill>
+                <a:latin typeface="Arial"/>
+                <a:ea typeface="Arial"/>
+                <a:cs typeface="Arial"/>
+                <a:sym typeface="Arial"/>
+              </a:rPr>
+              <a:t>(homeowners search your name directly)</a:t>
+            </a:r>
+            <a:endParaRPr sz="700"/>
+          </a:p>
+        </p:txBody>
+      </p:sp>
+      <p:sp>
+        <p:nvSpPr>
+          <p:cNvPr id="100" name="Google Shape;100;p16"/>
+          <p:cNvSpPr/>
+          <p:nvPr/>
+        </p:nvSpPr>
+        <p:spPr>
+          <a:xfrm>
+            <a:off x="548640" y="2907792"/>
+            <a:ext cx="1645920" cy="1645920"/>
+          </a:xfrm>
+          <a:prstGeom prst="ellipse">
+            <a:avLst/>
+          </a:prstGeom>
+          <a:noFill/>
+          <a:ln cap="flat" cmpd="sng" w="9525">
+            <a:solidFill>
+              <a:srgbClr val="A7C142"/>
+            </a:solidFill>
+            <a:prstDash val="sysDot"/>
+            <a:round/>
+            <a:headEnd len="sm" w="sm" type="none"/>
+            <a:tailEnd len="sm" w="sm" type="none"/>
+          </a:ln>
+        </p:spPr>
+        <p:txBody>
+          <a:bodyPr anchorCtr="0" anchor="t" bIns="0" lIns="0" spcFirstLastPara="1" rIns="0" wrap="square" tIns="0">
+            <a:noAutofit/>
+          </a:bodyPr>
+          <a:lstStyle/>
+          <a:p>
+            <a:pPr indent="0" lvl="0" marL="0" marR="0" rtl="0" algn="l">
+              <a:spcBef>
+                <a:spcPts val="0"/>
+              </a:spcBef>
+              <a:spcAft>
+                <a:spcPts val="0"/>
+              </a:spcAft>
+              <a:buNone/>
+            </a:pPr>
+            <a:r>
+              <a:rPr b="0" i="0" lang="en" sz="900">
+                <a:solidFill>
+                  <a:srgbClr val="666666"/>
+                </a:solidFill>
+                <a:latin typeface="Arial"/>
+                <a:ea typeface="Arial"/>
+                <a:cs typeface="Arial"/>
+                <a:sym typeface="Arial"/>
+              </a:rPr>
+              <a:t/>
+            </a:r>
+            <a:endParaRPr sz="900"/>
+          </a:p>
+        </p:txBody>
+      </p:sp>
+      <p:sp>
+        <p:nvSpPr>
+          <p:cNvPr id="101" name="Google Shape;101;p16"/>
+          <p:cNvSpPr/>
+          <p:nvPr/>
+        </p:nvSpPr>
+        <p:spPr>
+          <a:xfrm>
+            <a:off x="640080" y="2999232"/>
+            <a:ext cx="1463040" cy="1463040"/>
+          </a:xfrm>
+          <a:prstGeom prst="ellipse">
+            <a:avLst/>
           </a:prstGeom>
           <a:solidFill>
             <a:srgbClr val="FFFFFF"/>
@@ -8300,20 +8803,20 @@
       </p:sp>
       <p:sp>
         <p:nvSpPr>
-          <p:cNvPr id="93" name="Google Shape;93;p16"/>
-          <p:cNvSpPr/>
-          <p:nvPr/>
-        </p:nvSpPr>
-        <p:spPr>
-          <a:xfrm>
-            <a:off x="7342632" y="1170432"/>
-            <a:ext cx="164592" cy="164592"/>
+          <p:cNvPr id="102" name="Google Shape;102;p16"/>
+          <p:cNvSpPr/>
+          <p:nvPr/>
+        </p:nvSpPr>
+        <p:spPr>
+          <a:xfrm>
+            <a:off x="1321308" y="2857500"/>
+            <a:ext cx="100584" cy="100584"/>
           </a:xfrm>
           <a:prstGeom prst="ellipse">
             <a:avLst/>
           </a:prstGeom>
           <a:solidFill>
-            <a:srgbClr val="A7C142"/>
+            <a:srgbClr val="00823D"/>
           </a:solidFill>
           <a:ln>
             <a:noFill/>
@@ -8352,129 +8855,27 @@
       </p:sp>
       <p:sp>
         <p:nvSpPr>
-          <p:cNvPr id="94" name="Google Shape;94;p16"/>
-          <p:cNvSpPr/>
-          <p:nvPr/>
-        </p:nvSpPr>
-        <p:spPr>
-          <a:xfrm>
-            <a:off x="6281928" y="1389888"/>
-            <a:ext cx="2286000" cy="402336"/>
-          </a:xfrm>
-          <a:prstGeom prst="rect">
+          <p:cNvPr id="103" name="Google Shape;103;p16"/>
+          <p:cNvSpPr/>
+          <p:nvPr/>
+        </p:nvSpPr>
+        <p:spPr>
+          <a:xfrm>
+            <a:off x="1234440" y="3163824"/>
+            <a:ext cx="274320" cy="274320"/>
+          </a:xfrm>
+          <a:prstGeom prst="triangle">
             <a:avLst/>
           </a:prstGeom>
           <a:noFill/>
-          <a:ln>
-            <a:noFill/>
-          </a:ln>
-        </p:spPr>
-        <p:txBody>
-          <a:bodyPr anchorCtr="0" anchor="b" bIns="0" lIns="0" spcFirstLastPara="1" rIns="0" wrap="square" tIns="0">
-            <a:noAutofit/>
-          </a:bodyPr>
-          <a:lstStyle/>
-          <a:p>
-            <a:pPr indent="0" lvl="0" marL="0" marR="0" rtl="0" algn="ctr">
-              <a:lnSpc>
-                <a:spcPct val="100000"/>
-              </a:lnSpc>
-              <a:spcBef>
-                <a:spcPts val="0"/>
-              </a:spcBef>
-              <a:spcAft>
-                <a:spcPts val="0"/>
-              </a:spcAft>
-              <a:buNone/>
-            </a:pPr>
-            <a:r>
-              <a:rPr b="1" i="0" lang="en" sz="1100">
-                <a:solidFill>
-                  <a:srgbClr val="003726"/>
-                </a:solidFill>
-                <a:latin typeface="Arial"/>
-                <a:ea typeface="Arial"/>
-                <a:cs typeface="Arial"/>
-                <a:sym typeface="Arial"/>
-              </a:rPr>
-              <a:t>Lower CPL and Higher PPC Conversion Rates</a:t>
-            </a:r>
-            <a:endParaRPr sz="1100"/>
-          </a:p>
-        </p:txBody>
-      </p:sp>
-      <p:sp>
-        <p:nvSpPr>
-          <p:cNvPr id="95" name="Google Shape;95;p16"/>
-          <p:cNvSpPr/>
-          <p:nvPr/>
-        </p:nvSpPr>
-        <p:spPr>
-          <a:xfrm>
-            <a:off x="6281928" y="1819656"/>
-            <a:ext cx="2286000" cy="420624"/>
-          </a:xfrm>
-          <a:prstGeom prst="rect">
-            <a:avLst/>
-          </a:prstGeom>
-          <a:noFill/>
-          <a:ln>
-            <a:noFill/>
-          </a:ln>
-        </p:spPr>
-        <p:txBody>
-          <a:bodyPr anchorCtr="0" anchor="t" bIns="0" lIns="0" spcFirstLastPara="1" rIns="0" wrap="square" tIns="0">
-            <a:noAutofit/>
-          </a:bodyPr>
-          <a:lstStyle/>
-          <a:p>
-            <a:pPr indent="0" lvl="0" marL="0" marR="0" rtl="0" algn="ctr">
-              <a:lnSpc>
-                <a:spcPct val="100000"/>
-              </a:lnSpc>
-              <a:spcBef>
-                <a:spcPts val="0"/>
-              </a:spcBef>
-              <a:spcAft>
-                <a:spcPts val="0"/>
-              </a:spcAft>
-              <a:buNone/>
-            </a:pPr>
-            <a:r>
-              <a:rPr b="0" i="0" lang="en" sz="800">
-                <a:solidFill>
-                  <a:srgbClr val="666666"/>
-                </a:solidFill>
-                <a:latin typeface="Arial"/>
-                <a:ea typeface="Arial"/>
-                <a:cs typeface="Arial"/>
-                <a:sym typeface="Arial"/>
-              </a:rPr>
-              <a:t>(higher CTR, lower acquisition cost)</a:t>
-            </a:r>
-            <a:endParaRPr sz="800"/>
-          </a:p>
-        </p:txBody>
-      </p:sp>
-      <p:sp>
-        <p:nvSpPr>
-          <p:cNvPr id="96" name="Google Shape;96;p16"/>
-          <p:cNvSpPr/>
-          <p:nvPr/>
-        </p:nvSpPr>
-        <p:spPr>
-          <a:xfrm>
-            <a:off x="1719072" y="2487168"/>
-            <a:ext cx="5705856" cy="118872"/>
-          </a:xfrm>
-          <a:prstGeom prst="leftArrow">
-            <a:avLst/>
-          </a:prstGeom>
-          <a:solidFill>
-            <a:srgbClr val="A7C142"/>
-          </a:solidFill>
-          <a:ln>
-            <a:noFill/>
+          <a:ln cap="flat" cmpd="sng" w="9525">
+            <a:solidFill>
+              <a:srgbClr val="003726"/>
+            </a:solidFill>
+            <a:prstDash val="solid"/>
+            <a:round/>
+            <a:headEnd len="sm" w="sm" type="none"/>
+            <a:tailEnd len="sm" w="sm" type="none"/>
           </a:ln>
         </p:spPr>
         <p:txBody>
@@ -8510,14 +8911,120 @@
       </p:sp>
       <p:sp>
         <p:nvSpPr>
-          <p:cNvPr id="97" name="Google Shape;97;p16"/>
-          <p:cNvSpPr/>
-          <p:nvPr/>
-        </p:nvSpPr>
-        <p:spPr>
-          <a:xfrm>
-            <a:off x="429768" y="2816352"/>
-            <a:ext cx="8284464" cy="640080"/>
+          <p:cNvPr id="104" name="Google Shape;104;p16"/>
+          <p:cNvSpPr/>
+          <p:nvPr/>
+        </p:nvSpPr>
+        <p:spPr>
+          <a:xfrm>
+            <a:off x="722376" y="3456432"/>
+            <a:ext cx="1298448" cy="420624"/>
+          </a:xfrm>
+          <a:prstGeom prst="rect">
+            <a:avLst/>
+          </a:prstGeom>
+          <a:noFill/>
+          <a:ln>
+            <a:noFill/>
+          </a:ln>
+        </p:spPr>
+        <p:txBody>
+          <a:bodyPr anchorCtr="0" anchor="b" bIns="0" lIns="0" spcFirstLastPara="1" rIns="0" wrap="square" tIns="0">
+            <a:noAutofit/>
+          </a:bodyPr>
+          <a:lstStyle/>
+          <a:p>
+            <a:pPr indent="0" lvl="0" marL="0" marR="0" rtl="0" algn="ctr">
+              <a:lnSpc>
+                <a:spcPct val="100000"/>
+              </a:lnSpc>
+              <a:spcBef>
+                <a:spcPts val="0"/>
+              </a:spcBef>
+              <a:spcAft>
+                <a:spcPts val="0"/>
+              </a:spcAft>
+              <a:buNone/>
+            </a:pPr>
+            <a:r>
+              <a:rPr b="1" i="0" lang="en" sz="800">
+                <a:solidFill>
+                  <a:srgbClr val="003726"/>
+                </a:solidFill>
+                <a:latin typeface="Arial"/>
+                <a:ea typeface="Arial"/>
+                <a:cs typeface="Arial"/>
+                <a:sym typeface="Arial"/>
+              </a:rPr>
+              <a:t>Lower CPL and Higher PPC Conversion Rates</a:t>
+            </a:r>
+            <a:endParaRPr sz="800"/>
+          </a:p>
+        </p:txBody>
+      </p:sp>
+      <p:sp>
+        <p:nvSpPr>
+          <p:cNvPr id="105" name="Google Shape;105;p16"/>
+          <p:cNvSpPr/>
+          <p:nvPr/>
+        </p:nvSpPr>
+        <p:spPr>
+          <a:xfrm>
+            <a:off x="795528" y="3895344"/>
+            <a:ext cx="1152144" cy="347472"/>
+          </a:xfrm>
+          <a:prstGeom prst="rect">
+            <a:avLst/>
+          </a:prstGeom>
+          <a:noFill/>
+          <a:ln>
+            <a:noFill/>
+          </a:ln>
+        </p:spPr>
+        <p:txBody>
+          <a:bodyPr anchorCtr="0" anchor="t" bIns="0" lIns="0" spcFirstLastPara="1" rIns="0" wrap="square" tIns="0">
+            <a:noAutofit/>
+          </a:bodyPr>
+          <a:lstStyle/>
+          <a:p>
+            <a:pPr indent="0" lvl="0" marL="0" marR="0" rtl="0" algn="ctr">
+              <a:lnSpc>
+                <a:spcPct val="100000"/>
+              </a:lnSpc>
+              <a:spcBef>
+                <a:spcPts val="0"/>
+              </a:spcBef>
+              <a:spcAft>
+                <a:spcPts val="0"/>
+              </a:spcAft>
+              <a:buNone/>
+            </a:pPr>
+            <a:r>
+              <a:rPr b="0" i="0" lang="en" sz="700">
+                <a:solidFill>
+                  <a:srgbClr val="666666"/>
+                </a:solidFill>
+                <a:latin typeface="Arial"/>
+                <a:ea typeface="Arial"/>
+                <a:cs typeface="Arial"/>
+                <a:sym typeface="Arial"/>
+              </a:rPr>
+              <a:t>(higher CTR, lower acquisition cost)</a:t>
+            </a:r>
+            <a:endParaRPr sz="700"/>
+          </a:p>
+        </p:txBody>
+      </p:sp>
+      <p:sp>
+        <p:nvSpPr>
+          <p:cNvPr id="106" name="Google Shape;106;p16"/>
+          <p:cNvSpPr/>
+          <p:nvPr/>
+        </p:nvSpPr>
+        <p:spPr>
+          <a:xfrm>
+            <a:off x="4828032" y="1417320"/>
+            <a:ext cx="3886200" cy="914400"/>
           </a:xfrm>
           <a:prstGeom prst="roundRect">
             <a:avLst>
@@ -8564,14 +9071,14 @@
       </p:sp>
       <p:sp>
         <p:nvSpPr>
-          <p:cNvPr id="98" name="Google Shape;98;p16"/>
-          <p:cNvSpPr/>
-          <p:nvPr/>
-        </p:nvSpPr>
-        <p:spPr>
-          <a:xfrm>
-            <a:off x="658368" y="2926080"/>
-            <a:ext cx="7827264" cy="164592"/>
+          <p:cNvPr id="107" name="Google Shape;107;p16"/>
+          <p:cNvSpPr/>
+          <p:nvPr/>
+        </p:nvSpPr>
+        <p:spPr>
+          <a:xfrm>
+            <a:off x="5029200" y="1581912"/>
+            <a:ext cx="3483864" cy="164592"/>
           </a:xfrm>
           <a:prstGeom prst="rect">
             <a:avLst/>
@@ -8614,14 +9121,14 @@
       </p:sp>
       <p:sp>
         <p:nvSpPr>
-          <p:cNvPr id="99" name="Google Shape;99;p16"/>
-          <p:cNvSpPr/>
-          <p:nvPr/>
-        </p:nvSpPr>
-        <p:spPr>
-          <a:xfrm>
-            <a:off x="658368" y="3118104"/>
-            <a:ext cx="7827264" cy="201168"/>
+          <p:cNvPr id="108" name="Google Shape;108;p16"/>
+          <p:cNvSpPr/>
+          <p:nvPr/>
+        </p:nvSpPr>
+        <p:spPr>
+          <a:xfrm>
+            <a:off x="5029200" y="1819656"/>
+            <a:ext cx="3483864" cy="420624"/>
           </a:xfrm>
           <a:prstGeom prst="rect">
             <a:avLst/>
@@ -8632,12 +9139,15 @@
           </a:ln>
         </p:spPr>
         <p:txBody>
-          <a:bodyPr anchorCtr="0" anchor="ctr" bIns="0" lIns="0" spcFirstLastPara="1" rIns="0" wrap="square" tIns="0">
+          <a:bodyPr anchorCtr="0" anchor="t" bIns="0" lIns="0" spcFirstLastPara="1" rIns="0" wrap="square" tIns="0">
             <a:noAutofit/>
           </a:bodyPr>
           <a:lstStyle/>
           <a:p>
             <a:pPr indent="0" lvl="0" marL="0" marR="0" rtl="0" algn="l">
+              <a:lnSpc>
+                <a:spcPct val="115000"/>
+              </a:lnSpc>
               <a:spcBef>
                 <a:spcPts val="0"/>
               </a:spcBef>
@@ -8664,14 +9174,14 @@
       </p:sp>
       <p:sp>
         <p:nvSpPr>
-          <p:cNvPr id="100" name="Google Shape;100;p16"/>
-          <p:cNvSpPr/>
-          <p:nvPr/>
-        </p:nvSpPr>
-        <p:spPr>
-          <a:xfrm>
-            <a:off x="429768" y="3621024"/>
-            <a:ext cx="8284464" cy="914400"/>
+          <p:cNvPr id="109" name="Google Shape;109;p16"/>
+          <p:cNvSpPr/>
+          <p:nvPr/>
+        </p:nvSpPr>
+        <p:spPr>
+          <a:xfrm>
+            <a:off x="4828032" y="2651760"/>
+            <a:ext cx="3886200" cy="1325880"/>
           </a:xfrm>
           <a:prstGeom prst="roundRect">
             <a:avLst>
@@ -8724,14 +9234,14 @@
       </p:sp>
       <p:sp>
         <p:nvSpPr>
-          <p:cNvPr id="101" name="Google Shape;101;p16"/>
-          <p:cNvSpPr/>
-          <p:nvPr/>
-        </p:nvSpPr>
-        <p:spPr>
-          <a:xfrm>
-            <a:off x="658368" y="3749040"/>
-            <a:ext cx="7827264" cy="164592"/>
+          <p:cNvPr id="110" name="Google Shape;110;p16"/>
+          <p:cNvSpPr/>
+          <p:nvPr/>
+        </p:nvSpPr>
+        <p:spPr>
+          <a:xfrm>
+            <a:off x="5029200" y="2816352"/>
+            <a:ext cx="3483864" cy="164592"/>
           </a:xfrm>
           <a:prstGeom prst="rect">
             <a:avLst/>
@@ -8774,14 +9284,14 @@
       </p:sp>
       <p:sp>
         <p:nvSpPr>
-          <p:cNvPr id="102" name="Google Shape;102;p16"/>
-          <p:cNvSpPr/>
-          <p:nvPr/>
-        </p:nvSpPr>
-        <p:spPr>
-          <a:xfrm>
-            <a:off x="658368" y="3986784"/>
-            <a:ext cx="7827264" cy="457200"/>
+          <p:cNvPr id="111" name="Google Shape;111;p16"/>
+          <p:cNvSpPr/>
+          <p:nvPr/>
+        </p:nvSpPr>
+        <p:spPr>
+          <a:xfrm>
+            <a:off x="5029200" y="3072384"/>
+            <a:ext cx="3483864" cy="822960"/>
           </a:xfrm>
           <a:prstGeom prst="rect">
             <a:avLst/>
@@ -8798,11 +9308,14 @@
           <a:lstStyle/>
           <a:p>
             <a:pPr indent="-152400" lvl="0" marL="152400" marR="0" rtl="0" algn="l">
-              <a:spcBef>
-                <a:spcPts val="0"/>
-              </a:spcBef>
-              <a:spcAft>
-                <a:spcPts val="400"/>
+              <a:lnSpc>
+                <a:spcPct val="115000"/>
+              </a:lnSpc>
+              <a:spcBef>
+                <a:spcPts val="0"/>
+              </a:spcBef>
+              <a:spcAft>
+                <a:spcPts val="700"/>
               </a:spcAft>
               <a:buClr>
                 <a:srgbClr val="00823D"/>
@@ -8839,6 +9352,9 @@
           </a:p>
           <a:p>
             <a:pPr indent="-152400" lvl="0" marL="152400" marR="0" rtl="0" algn="l">
+              <a:lnSpc>
+                <a:spcPct val="115000"/>
+              </a:lnSpc>
               <a:spcBef>
                 <a:spcPts val="0"/>
               </a:spcBef>
